--- a/Slides/S25/7.0-Power.pptx
+++ b/Slides/S25/7.0-Power.pptx
@@ -23,7 +23,7 @@
     <p:sldId id="260" r:id="rId16"/>
     <p:sldId id="283" r:id="rId17"/>
     <p:sldId id="264" r:id="rId18"/>
-    <p:sldId id="266" r:id="rId19"/>
+    <p:sldId id="373" r:id="rId19"/>
     <p:sldId id="284" r:id="rId20"/>
     <p:sldId id="285" r:id="rId21"/>
     <p:sldId id="286" r:id="rId22"/>
@@ -33,7 +33,7 @@
     <p:sldId id="290" r:id="rId26"/>
     <p:sldId id="263" r:id="rId27"/>
     <p:sldId id="291" r:id="rId28"/>
-    <p:sldId id="292" r:id="rId29"/>
+    <p:sldId id="374" r:id="rId29"/>
     <p:sldId id="293" r:id="rId30"/>
     <p:sldId id="297" r:id="rId31"/>
     <p:sldId id="299" r:id="rId32"/>
@@ -326,7 +326,7 @@
               <a:pPr>
                 <a:defRPr/>
               </a:pPr>
-              <a:t>2/15/24</a:t>
+              <a:t>3/26/26</a:t>
             </a:fld>
             <a:endParaRPr lang="en-US" altLang="en-US" dirty="0"/>
           </a:p>
@@ -566,7 +566,7 @@
               <a:pPr>
                 <a:defRPr/>
               </a:pPr>
-              <a:t>2/15/24</a:t>
+              <a:t>3/26/26</a:t>
             </a:fld>
             <a:endParaRPr lang="en-US" altLang="en-US" dirty="0"/>
           </a:p>
@@ -1046,14 +1046,14 @@
         <p:spPr>
           <a:extLst>
             <a:ext uri="{909E8E84-426E-40dd-AFC4-6F175D3DCCD1}">
-              <a14:hiddenFill xmlns="" xmlns:a14="http://schemas.microsoft.com/office/drawing/2010/main">
+              <a14:hiddenFill xmlns:a14="http://schemas.microsoft.com/office/drawing/2010/main" xmlns="">
                 <a:solidFill>
                   <a:schemeClr val="accent1"/>
                 </a:solidFill>
               </a14:hiddenFill>
             </a:ext>
             <a:ext uri="{91240B29-F687-4f45-9708-019B960494DF}">
-              <a14:hiddenLine xmlns="" xmlns:a14="http://schemas.microsoft.com/office/drawing/2010/main" w="9525">
+              <a14:hiddenLine xmlns:a14="http://schemas.microsoft.com/office/drawing/2010/main" xmlns="" w="9525">
                 <a:solidFill>
                   <a:schemeClr val="tx1"/>
                 </a:solidFill>
@@ -1063,7 +1063,7 @@
               </a14:hiddenLine>
             </a:ext>
             <a:ext uri="{AF507438-7753-43e0-B8FC-AC1667EBCBE1}">
-              <a14:hiddenEffects xmlns="" xmlns:a14="http://schemas.microsoft.com/office/drawing/2010/main">
+              <a14:hiddenEffects xmlns:a14="http://schemas.microsoft.com/office/drawing/2010/main" xmlns="">
                 <a:effectLst>
                   <a:outerShdw blurRad="63500" dist="38099" dir="2700000" algn="ctr" rotWithShape="0">
                     <a:schemeClr val="bg2">
@@ -1074,7 +1074,7 @@
               </a14:hiddenEffects>
             </a:ext>
             <a:ext uri="{FAA26D3D-D897-4be2-8F04-BA451C77F1D7}">
-              <ma14:placeholderFlag xmlns="" xmlns:ma14="http://schemas.microsoft.com/office/mac/drawingml/2011/main" val="1"/>
+              <ma14:placeholderFlag xmlns:ma14="http://schemas.microsoft.com/office/mac/drawingml/2011/main" xmlns="" val="1"/>
             </a:ext>
           </a:extLst>
         </p:spPr>
@@ -1218,7 +1218,7 @@
           <a:ln/>
           <a:extLst>
             <a:ext uri="{FAA26D3D-D897-4be2-8F04-BA451C77F1D7}">
-              <ma14:placeholderFlag xmlns="" xmlns:ma14="http://schemas.microsoft.com/office/mac/drawingml/2011/main" val="1"/>
+              <ma14:placeholderFlag xmlns:ma14="http://schemas.microsoft.com/office/mac/drawingml/2011/main" xmlns="" val="1"/>
             </a:ext>
           </a:extLst>
         </p:spPr>
@@ -1356,14 +1356,14 @@
         <p:spPr>
           <a:extLst>
             <a:ext uri="{909E8E84-426E-40dd-AFC4-6F175D3DCCD1}">
-              <a14:hiddenFill xmlns="" xmlns:a14="http://schemas.microsoft.com/office/drawing/2010/main">
+              <a14:hiddenFill xmlns:a14="http://schemas.microsoft.com/office/drawing/2010/main" xmlns="">
                 <a:solidFill>
                   <a:schemeClr val="accent1"/>
                 </a:solidFill>
               </a14:hiddenFill>
             </a:ext>
             <a:ext uri="{91240B29-F687-4f45-9708-019B960494DF}">
-              <a14:hiddenLine xmlns="" xmlns:a14="http://schemas.microsoft.com/office/drawing/2010/main" w="9525">
+              <a14:hiddenLine xmlns:a14="http://schemas.microsoft.com/office/drawing/2010/main" xmlns="" w="9525">
                 <a:solidFill>
                   <a:schemeClr val="tx1"/>
                 </a:solidFill>
@@ -1373,7 +1373,7 @@
               </a14:hiddenLine>
             </a:ext>
             <a:ext uri="{AF507438-7753-43e0-B8FC-AC1667EBCBE1}">
-              <a14:hiddenEffects xmlns="" xmlns:a14="http://schemas.microsoft.com/office/drawing/2010/main">
+              <a14:hiddenEffects xmlns:a14="http://schemas.microsoft.com/office/drawing/2010/main" xmlns="">
                 <a:effectLst>
                   <a:outerShdw blurRad="63500" dist="38099" dir="2700000" algn="ctr" rotWithShape="0">
                     <a:schemeClr val="bg2">
@@ -1384,7 +1384,7 @@
               </a14:hiddenEffects>
             </a:ext>
             <a:ext uri="{FAA26D3D-D897-4be2-8F04-BA451C77F1D7}">
-              <ma14:placeholderFlag xmlns="" xmlns:ma14="http://schemas.microsoft.com/office/mac/drawingml/2011/main" val="1"/>
+              <ma14:placeholderFlag xmlns:ma14="http://schemas.microsoft.com/office/mac/drawingml/2011/main" xmlns="" val="1"/>
             </a:ext>
           </a:extLst>
         </p:spPr>
@@ -1528,7 +1528,7 @@
           <a:ln/>
           <a:extLst>
             <a:ext uri="{FAA26D3D-D897-4be2-8F04-BA451C77F1D7}">
-              <ma14:placeholderFlag xmlns="" xmlns:ma14="http://schemas.microsoft.com/office/mac/drawingml/2011/main" val="1"/>
+              <ma14:placeholderFlag xmlns:ma14="http://schemas.microsoft.com/office/mac/drawingml/2011/main" xmlns="" val="1"/>
             </a:ext>
           </a:extLst>
         </p:spPr>
@@ -1582,7 +1582,13 @@
   <p:cSld>
     <p:spTree>
       <p:nvGrpSpPr>
-        <p:cNvPr id="1" name=""/>
+        <p:cNvPr id="1" name="">
+          <a:extLst>
+            <a:ext uri="{FF2B5EF4-FFF2-40B4-BE49-F238E27FC236}">
+              <a16:creationId xmlns:a16="http://schemas.microsoft.com/office/drawing/2014/main" id="{D5288FC4-EF61-14B4-D2E2-0C07AED9ADBA}"/>
+            </a:ext>
+          </a:extLst>
+        </p:cNvPr>
         <p:cNvGrpSpPr/>
         <p:nvPr/>
       </p:nvGrpSpPr>
@@ -1599,7 +1605,7 @@
           <p:cNvPr id="7" name="Rectangle 7">
             <a:extLst>
               <a:ext uri="{FF2B5EF4-FFF2-40B4-BE49-F238E27FC236}">
-                <a16:creationId xmlns:a16="http://schemas.microsoft.com/office/drawing/2014/main" id="{23A7F9C6-0CBE-494C-ADC9-27C4D788683B}"/>
+                <a16:creationId xmlns:a16="http://schemas.microsoft.com/office/drawing/2014/main" id="{A6092141-60AB-0D45-4680-94525C4608B6}"/>
               </a:ext>
             </a:extLst>
           </p:cNvPr>
@@ -1613,14 +1619,14 @@
         <p:spPr>
           <a:extLst>
             <a:ext uri="{909E8E84-426E-40dd-AFC4-6F175D3DCCD1}">
-              <a14:hiddenFill xmlns="" xmlns:a14="http://schemas.microsoft.com/office/drawing/2010/main">
+              <a14:hiddenFill xmlns:a14="http://schemas.microsoft.com/office/drawing/2010/main" xmlns="">
                 <a:solidFill>
                   <a:schemeClr val="accent1"/>
                 </a:solidFill>
               </a14:hiddenFill>
             </a:ext>
             <a:ext uri="{91240B29-F687-4f45-9708-019B960494DF}">
-              <a14:hiddenLine xmlns="" xmlns:a14="http://schemas.microsoft.com/office/drawing/2010/main" w="9525">
+              <a14:hiddenLine xmlns:a14="http://schemas.microsoft.com/office/drawing/2010/main" xmlns="" w="9525">
                 <a:solidFill>
                   <a:schemeClr val="tx1"/>
                 </a:solidFill>
@@ -1630,7 +1636,7 @@
               </a14:hiddenLine>
             </a:ext>
             <a:ext uri="{AF507438-7753-43e0-B8FC-AC1667EBCBE1}">
-              <a14:hiddenEffects xmlns="" xmlns:a14="http://schemas.microsoft.com/office/drawing/2010/main">
+              <a14:hiddenEffects xmlns:a14="http://schemas.microsoft.com/office/drawing/2010/main" xmlns="">
                 <a:effectLst>
                   <a:outerShdw blurRad="63500" dist="38099" dir="2700000" algn="ctr" rotWithShape="0">
                     <a:schemeClr val="bg2">
@@ -1641,7 +1647,7 @@
               </a14:hiddenEffects>
             </a:ext>
             <a:ext uri="{FAA26D3D-D897-4be2-8F04-BA451C77F1D7}">
-              <ma14:placeholderFlag xmlns="" xmlns:ma14="http://schemas.microsoft.com/office/mac/drawingml/2011/main" val="1"/>
+              <ma14:placeholderFlag xmlns:ma14="http://schemas.microsoft.com/office/mac/drawingml/2011/main" xmlns="" val="1"/>
             </a:ext>
           </a:extLst>
         </p:spPr>
@@ -1756,7 +1762,7 @@
           </a:lstStyle>
           <a:p>
             <a:pPr eaLnBrk="1" hangingPunct="1"/>
-            <a:fld id="{A4F6710F-A380-A745-8218-11D64CDFFA38}" type="slidenum">
+            <a:fld id="{4B4FD66C-80E4-2242-88C9-E95C19D3A67D}" type="slidenum">
               <a:rPr lang="en-US" altLang="en-US" sz="1200"/>
               <a:pPr eaLnBrk="1" hangingPunct="1"/>
               <a:t>12</a:t>
@@ -1767,10 +1773,10 @@
       </p:sp>
       <p:sp>
         <p:nvSpPr>
-          <p:cNvPr id="871426" name="Rectangle 2">
+          <p:cNvPr id="869378" name="Rectangle 2">
             <a:extLst>
               <a:ext uri="{FF2B5EF4-FFF2-40B4-BE49-F238E27FC236}">
-                <a16:creationId xmlns:a16="http://schemas.microsoft.com/office/drawing/2014/main" id="{A5576692-E74C-0C48-B6B4-BF3173CCE516}"/>
+                <a16:creationId xmlns:a16="http://schemas.microsoft.com/office/drawing/2014/main" id="{2B32C7AA-E840-0E7A-1872-B4C6D8600264}"/>
               </a:ext>
             </a:extLst>
           </p:cNvPr>
@@ -1785,17 +1791,17 @@
           <a:ln/>
           <a:extLst>
             <a:ext uri="{FAA26D3D-D897-4be2-8F04-BA451C77F1D7}">
-              <ma14:placeholderFlag xmlns="" xmlns:ma14="http://schemas.microsoft.com/office/mac/drawingml/2011/main" val="1"/>
+              <ma14:placeholderFlag xmlns:ma14="http://schemas.microsoft.com/office/mac/drawingml/2011/main" xmlns="" val="1"/>
             </a:ext>
           </a:extLst>
         </p:spPr>
       </p:sp>
       <p:sp>
         <p:nvSpPr>
-          <p:cNvPr id="871427" name="Rectangle 3">
+          <p:cNvPr id="869379" name="Rectangle 3">
             <a:extLst>
               <a:ext uri="{FF2B5EF4-FFF2-40B4-BE49-F238E27FC236}">
-                <a16:creationId xmlns:a16="http://schemas.microsoft.com/office/drawing/2014/main" id="{C5E8B313-A7BB-8E47-9D5A-8AAA6C140708}"/>
+                <a16:creationId xmlns:a16="http://schemas.microsoft.com/office/drawing/2014/main" id="{8F633D62-285A-7159-C1FE-75CE45AF2285}"/>
               </a:ext>
             </a:extLst>
           </p:cNvPr>
@@ -1814,22 +1820,17 @@
             <a:pPr eaLnBrk="1" hangingPunct="1">
               <a:defRPr/>
             </a:pPr>
-            <a:r>
-              <a:rPr lang="en-US" dirty="0"/>
-              <a:t>Calculate the total logic and memory capacitance of the system. Calculate the switching power for the logic and memory and add them to obtain the total dynamic power</a:t>
-            </a:r>
-            <a:r>
-              <a:rPr lang="en-US" b="1" dirty="0"/>
-              <a:t>.</a:t>
-            </a:r>
-            <a:endParaRPr lang="en-US" dirty="0"/>
+            <a:endParaRPr lang="en-US" altLang="en-US" dirty="0">
+              <a:ea typeface="ＭＳ Ｐゴシック"/>
+              <a:cs typeface="Calibri"/>
+            </a:endParaRPr>
           </a:p>
         </p:txBody>
       </p:sp>
     </p:spTree>
     <p:extLst>
       <p:ext uri="{BB962C8B-B14F-4D97-AF65-F5344CB8AC3E}">
-        <p14:creationId xmlns:p14="http://schemas.microsoft.com/office/powerpoint/2010/main" val="2540293412"/>
+        <p14:creationId xmlns:p14="http://schemas.microsoft.com/office/powerpoint/2010/main" val="2865312453"/>
       </p:ext>
     </p:extLst>
   </p:cSld>
@@ -1875,14 +1876,14 @@
         <p:spPr>
           <a:extLst>
             <a:ext uri="{909E8E84-426E-40dd-AFC4-6F175D3DCCD1}">
-              <a14:hiddenFill xmlns="" xmlns:a14="http://schemas.microsoft.com/office/drawing/2010/main">
+              <a14:hiddenFill xmlns:a14="http://schemas.microsoft.com/office/drawing/2010/main" xmlns="">
                 <a:solidFill>
                   <a:schemeClr val="accent1"/>
                 </a:solidFill>
               </a14:hiddenFill>
             </a:ext>
             <a:ext uri="{91240B29-F687-4f45-9708-019B960494DF}">
-              <a14:hiddenLine xmlns="" xmlns:a14="http://schemas.microsoft.com/office/drawing/2010/main" w="9525">
+              <a14:hiddenLine xmlns:a14="http://schemas.microsoft.com/office/drawing/2010/main" xmlns="" w="9525">
                 <a:solidFill>
                   <a:schemeClr val="tx1"/>
                 </a:solidFill>
@@ -1892,7 +1893,7 @@
               </a14:hiddenLine>
             </a:ext>
             <a:ext uri="{AF507438-7753-43e0-B8FC-AC1667EBCBE1}">
-              <a14:hiddenEffects xmlns="" xmlns:a14="http://schemas.microsoft.com/office/drawing/2010/main">
+              <a14:hiddenEffects xmlns:a14="http://schemas.microsoft.com/office/drawing/2010/main" xmlns="">
                 <a:effectLst>
                   <a:outerShdw blurRad="63500" dist="38099" dir="2700000" algn="ctr" rotWithShape="0">
                     <a:schemeClr val="bg2">
@@ -1903,7 +1904,7 @@
               </a14:hiddenEffects>
             </a:ext>
             <a:ext uri="{FAA26D3D-D897-4be2-8F04-BA451C77F1D7}">
-              <ma14:placeholderFlag xmlns="" xmlns:ma14="http://schemas.microsoft.com/office/mac/drawingml/2011/main" val="1"/>
+              <ma14:placeholderFlag xmlns:ma14="http://schemas.microsoft.com/office/mac/drawingml/2011/main" xmlns="" val="1"/>
             </a:ext>
           </a:extLst>
         </p:spPr>
@@ -2047,7 +2048,7 @@
           <a:ln/>
           <a:extLst>
             <a:ext uri="{FAA26D3D-D897-4be2-8F04-BA451C77F1D7}">
-              <ma14:placeholderFlag xmlns="" xmlns:ma14="http://schemas.microsoft.com/office/mac/drawingml/2011/main" val="1"/>
+              <ma14:placeholderFlag xmlns:ma14="http://schemas.microsoft.com/office/mac/drawingml/2011/main" xmlns="" val="1"/>
             </a:ext>
           </a:extLst>
         </p:spPr>
@@ -2183,14 +2184,14 @@
         <p:spPr>
           <a:extLst>
             <a:ext uri="{909E8E84-426E-40dd-AFC4-6F175D3DCCD1}">
-              <a14:hiddenFill xmlns="" xmlns:a14="http://schemas.microsoft.com/office/drawing/2010/main">
+              <a14:hiddenFill xmlns:a14="http://schemas.microsoft.com/office/drawing/2010/main" xmlns="">
                 <a:solidFill>
                   <a:schemeClr val="accent1"/>
                 </a:solidFill>
               </a14:hiddenFill>
             </a:ext>
             <a:ext uri="{91240B29-F687-4f45-9708-019B960494DF}">
-              <a14:hiddenLine xmlns="" xmlns:a14="http://schemas.microsoft.com/office/drawing/2010/main" w="9525">
+              <a14:hiddenLine xmlns:a14="http://schemas.microsoft.com/office/drawing/2010/main" xmlns="" w="9525">
                 <a:solidFill>
                   <a:schemeClr val="tx1"/>
                 </a:solidFill>
@@ -2200,7 +2201,7 @@
               </a14:hiddenLine>
             </a:ext>
             <a:ext uri="{AF507438-7753-43e0-B8FC-AC1667EBCBE1}">
-              <a14:hiddenEffects xmlns="" xmlns:a14="http://schemas.microsoft.com/office/drawing/2010/main">
+              <a14:hiddenEffects xmlns:a14="http://schemas.microsoft.com/office/drawing/2010/main" xmlns="">
                 <a:effectLst>
                   <a:outerShdw blurRad="63500" dist="38099" dir="2700000" algn="ctr" rotWithShape="0">
                     <a:schemeClr val="bg2">
@@ -2211,7 +2212,7 @@
               </a14:hiddenEffects>
             </a:ext>
             <a:ext uri="{FAA26D3D-D897-4be2-8F04-BA451C77F1D7}">
-              <ma14:placeholderFlag xmlns="" xmlns:ma14="http://schemas.microsoft.com/office/mac/drawingml/2011/main" val="1"/>
+              <ma14:placeholderFlag xmlns:ma14="http://schemas.microsoft.com/office/mac/drawingml/2011/main" xmlns="" val="1"/>
             </a:ext>
           </a:extLst>
         </p:spPr>
@@ -2355,7 +2356,7 @@
           <a:ln/>
           <a:extLst>
             <a:ext uri="{FAA26D3D-D897-4be2-8F04-BA451C77F1D7}">
-              <ma14:placeholderFlag xmlns="" xmlns:ma14="http://schemas.microsoft.com/office/mac/drawingml/2011/main" val="1"/>
+              <ma14:placeholderFlag xmlns:ma14="http://schemas.microsoft.com/office/mac/drawingml/2011/main" xmlns="" val="1"/>
             </a:ext>
           </a:extLst>
         </p:spPr>
@@ -2439,14 +2440,14 @@
         <p:spPr>
           <a:extLst>
             <a:ext uri="{909E8E84-426E-40dd-AFC4-6F175D3DCCD1}">
-              <a14:hiddenFill xmlns="" xmlns:a14="http://schemas.microsoft.com/office/drawing/2010/main">
+              <a14:hiddenFill xmlns:a14="http://schemas.microsoft.com/office/drawing/2010/main" xmlns="">
                 <a:solidFill>
                   <a:schemeClr val="accent1"/>
                 </a:solidFill>
               </a14:hiddenFill>
             </a:ext>
             <a:ext uri="{91240B29-F687-4f45-9708-019B960494DF}">
-              <a14:hiddenLine xmlns="" xmlns:a14="http://schemas.microsoft.com/office/drawing/2010/main" w="9525">
+              <a14:hiddenLine xmlns:a14="http://schemas.microsoft.com/office/drawing/2010/main" xmlns="" w="9525">
                 <a:solidFill>
                   <a:schemeClr val="tx1"/>
                 </a:solidFill>
@@ -2456,7 +2457,7 @@
               </a14:hiddenLine>
             </a:ext>
             <a:ext uri="{AF507438-7753-43e0-B8FC-AC1667EBCBE1}">
-              <a14:hiddenEffects xmlns="" xmlns:a14="http://schemas.microsoft.com/office/drawing/2010/main">
+              <a14:hiddenEffects xmlns:a14="http://schemas.microsoft.com/office/drawing/2010/main" xmlns="">
                 <a:effectLst>
                   <a:outerShdw blurRad="63500" dist="38099" dir="2700000" algn="ctr" rotWithShape="0">
                     <a:schemeClr val="bg2">
@@ -2467,7 +2468,7 @@
               </a14:hiddenEffects>
             </a:ext>
             <a:ext uri="{FAA26D3D-D897-4be2-8F04-BA451C77F1D7}">
-              <ma14:placeholderFlag xmlns="" xmlns:ma14="http://schemas.microsoft.com/office/mac/drawingml/2011/main" val="1"/>
+              <ma14:placeholderFlag xmlns:ma14="http://schemas.microsoft.com/office/mac/drawingml/2011/main" xmlns="" val="1"/>
             </a:ext>
           </a:extLst>
         </p:spPr>
@@ -2611,7 +2612,7 @@
           <a:ln/>
           <a:extLst>
             <a:ext uri="{FAA26D3D-D897-4be2-8F04-BA451C77F1D7}">
-              <ma14:placeholderFlag xmlns="" xmlns:ma14="http://schemas.microsoft.com/office/mac/drawingml/2011/main" val="1"/>
+              <ma14:placeholderFlag xmlns:ma14="http://schemas.microsoft.com/office/mac/drawingml/2011/main" xmlns="" val="1"/>
             </a:ext>
           </a:extLst>
         </p:spPr>
@@ -2696,14 +2697,14 @@
         <p:spPr>
           <a:extLst>
             <a:ext uri="{909E8E84-426E-40dd-AFC4-6F175D3DCCD1}">
-              <a14:hiddenFill xmlns="" xmlns:a14="http://schemas.microsoft.com/office/drawing/2010/main">
+              <a14:hiddenFill xmlns:a14="http://schemas.microsoft.com/office/drawing/2010/main" xmlns="">
                 <a:solidFill>
                   <a:schemeClr val="accent1"/>
                 </a:solidFill>
               </a14:hiddenFill>
             </a:ext>
             <a:ext uri="{91240B29-F687-4f45-9708-019B960494DF}">
-              <a14:hiddenLine xmlns="" xmlns:a14="http://schemas.microsoft.com/office/drawing/2010/main" w="9525">
+              <a14:hiddenLine xmlns:a14="http://schemas.microsoft.com/office/drawing/2010/main" xmlns="" w="9525">
                 <a:solidFill>
                   <a:schemeClr val="tx1"/>
                 </a:solidFill>
@@ -2713,7 +2714,7 @@
               </a14:hiddenLine>
             </a:ext>
             <a:ext uri="{AF507438-7753-43e0-B8FC-AC1667EBCBE1}">
-              <a14:hiddenEffects xmlns="" xmlns:a14="http://schemas.microsoft.com/office/drawing/2010/main">
+              <a14:hiddenEffects xmlns:a14="http://schemas.microsoft.com/office/drawing/2010/main" xmlns="">
                 <a:effectLst>
                   <a:outerShdw blurRad="63500" dist="38099" dir="2700000" algn="ctr" rotWithShape="0">
                     <a:schemeClr val="bg2">
@@ -2724,7 +2725,7 @@
               </a14:hiddenEffects>
             </a:ext>
             <a:ext uri="{FAA26D3D-D897-4be2-8F04-BA451C77F1D7}">
-              <ma14:placeholderFlag xmlns="" xmlns:ma14="http://schemas.microsoft.com/office/mac/drawingml/2011/main" val="1"/>
+              <ma14:placeholderFlag xmlns:ma14="http://schemas.microsoft.com/office/mac/drawingml/2011/main" xmlns="" val="1"/>
             </a:ext>
           </a:extLst>
         </p:spPr>
@@ -2868,7 +2869,7 @@
           <a:ln/>
           <a:extLst>
             <a:ext uri="{FAA26D3D-D897-4be2-8F04-BA451C77F1D7}">
-              <ma14:placeholderFlag xmlns="" xmlns:ma14="http://schemas.microsoft.com/office/mac/drawingml/2011/main" val="1"/>
+              <ma14:placeholderFlag xmlns:ma14="http://schemas.microsoft.com/office/mac/drawingml/2011/main" xmlns="" val="1"/>
             </a:ext>
           </a:extLst>
         </p:spPr>
@@ -3063,14 +3064,14 @@
         <p:spPr>
           <a:extLst>
             <a:ext uri="{909E8E84-426E-40dd-AFC4-6F175D3DCCD1}">
-              <a14:hiddenFill xmlns="" xmlns:a14="http://schemas.microsoft.com/office/drawing/2010/main">
+              <a14:hiddenFill xmlns:a14="http://schemas.microsoft.com/office/drawing/2010/main" xmlns="">
                 <a:solidFill>
                   <a:schemeClr val="accent1"/>
                 </a:solidFill>
               </a14:hiddenFill>
             </a:ext>
             <a:ext uri="{91240B29-F687-4f45-9708-019B960494DF}">
-              <a14:hiddenLine xmlns="" xmlns:a14="http://schemas.microsoft.com/office/drawing/2010/main" w="9525">
+              <a14:hiddenLine xmlns:a14="http://schemas.microsoft.com/office/drawing/2010/main" xmlns="" w="9525">
                 <a:solidFill>
                   <a:schemeClr val="tx1"/>
                 </a:solidFill>
@@ -3080,7 +3081,7 @@
               </a14:hiddenLine>
             </a:ext>
             <a:ext uri="{AF507438-7753-43e0-B8FC-AC1667EBCBE1}">
-              <a14:hiddenEffects xmlns="" xmlns:a14="http://schemas.microsoft.com/office/drawing/2010/main">
+              <a14:hiddenEffects xmlns:a14="http://schemas.microsoft.com/office/drawing/2010/main" xmlns="">
                 <a:effectLst>
                   <a:outerShdw blurRad="63500" dist="38099" dir="2700000" algn="ctr" rotWithShape="0">
                     <a:schemeClr val="bg2">
@@ -3091,7 +3092,7 @@
               </a14:hiddenEffects>
             </a:ext>
             <a:ext uri="{FAA26D3D-D897-4be2-8F04-BA451C77F1D7}">
-              <ma14:placeholderFlag xmlns="" xmlns:ma14="http://schemas.microsoft.com/office/mac/drawingml/2011/main" val="1"/>
+              <ma14:placeholderFlag xmlns:ma14="http://schemas.microsoft.com/office/mac/drawingml/2011/main" xmlns="" val="1"/>
             </a:ext>
           </a:extLst>
         </p:spPr>
@@ -3235,7 +3236,7 @@
           <a:ln/>
           <a:extLst>
             <a:ext uri="{FAA26D3D-D897-4be2-8F04-BA451C77F1D7}">
-              <ma14:placeholderFlag xmlns="" xmlns:ma14="http://schemas.microsoft.com/office/mac/drawingml/2011/main" val="1"/>
+              <ma14:placeholderFlag xmlns:ma14="http://schemas.microsoft.com/office/mac/drawingml/2011/main" xmlns="" val="1"/>
             </a:ext>
           </a:extLst>
         </p:spPr>
@@ -3334,14 +3335,14 @@
         <p:spPr>
           <a:extLst>
             <a:ext uri="{909E8E84-426E-40dd-AFC4-6F175D3DCCD1}">
-              <a14:hiddenFill xmlns="" xmlns:a14="http://schemas.microsoft.com/office/drawing/2010/main">
+              <a14:hiddenFill xmlns:a14="http://schemas.microsoft.com/office/drawing/2010/main" xmlns="">
                 <a:solidFill>
                   <a:schemeClr val="accent1"/>
                 </a:solidFill>
               </a14:hiddenFill>
             </a:ext>
             <a:ext uri="{91240B29-F687-4f45-9708-019B960494DF}">
-              <a14:hiddenLine xmlns="" xmlns:a14="http://schemas.microsoft.com/office/drawing/2010/main" w="9525">
+              <a14:hiddenLine xmlns:a14="http://schemas.microsoft.com/office/drawing/2010/main" xmlns="" w="9525">
                 <a:solidFill>
                   <a:schemeClr val="tx1"/>
                 </a:solidFill>
@@ -3351,7 +3352,7 @@
               </a14:hiddenLine>
             </a:ext>
             <a:ext uri="{AF507438-7753-43e0-B8FC-AC1667EBCBE1}">
-              <a14:hiddenEffects xmlns="" xmlns:a14="http://schemas.microsoft.com/office/drawing/2010/main">
+              <a14:hiddenEffects xmlns:a14="http://schemas.microsoft.com/office/drawing/2010/main" xmlns="">
                 <a:effectLst>
                   <a:outerShdw blurRad="63500" dist="38099" dir="2700000" algn="ctr" rotWithShape="0">
                     <a:schemeClr val="bg2">
@@ -3362,7 +3363,7 @@
               </a14:hiddenEffects>
             </a:ext>
             <a:ext uri="{FAA26D3D-D897-4be2-8F04-BA451C77F1D7}">
-              <ma14:placeholderFlag xmlns="" xmlns:ma14="http://schemas.microsoft.com/office/mac/drawingml/2011/main" val="1"/>
+              <ma14:placeholderFlag xmlns:ma14="http://schemas.microsoft.com/office/mac/drawingml/2011/main" xmlns="" val="1"/>
             </a:ext>
           </a:extLst>
         </p:spPr>
@@ -3506,7 +3507,7 @@
           <a:ln/>
           <a:extLst>
             <a:ext uri="{FAA26D3D-D897-4be2-8F04-BA451C77F1D7}">
-              <ma14:placeholderFlag xmlns="" xmlns:ma14="http://schemas.microsoft.com/office/mac/drawingml/2011/main" val="1"/>
+              <ma14:placeholderFlag xmlns:ma14="http://schemas.microsoft.com/office/mac/drawingml/2011/main" xmlns="" val="1"/>
             </a:ext>
           </a:extLst>
         </p:spPr>
@@ -3624,14 +3625,14 @@
         <p:spPr>
           <a:extLst>
             <a:ext uri="{909E8E84-426E-40dd-AFC4-6F175D3DCCD1}">
-              <a14:hiddenFill xmlns="" xmlns:a14="http://schemas.microsoft.com/office/drawing/2010/main">
+              <a14:hiddenFill xmlns:a14="http://schemas.microsoft.com/office/drawing/2010/main" xmlns="">
                 <a:solidFill>
                   <a:schemeClr val="accent1"/>
                 </a:solidFill>
               </a14:hiddenFill>
             </a:ext>
             <a:ext uri="{91240B29-F687-4f45-9708-019B960494DF}">
-              <a14:hiddenLine xmlns="" xmlns:a14="http://schemas.microsoft.com/office/drawing/2010/main" w="9525">
+              <a14:hiddenLine xmlns:a14="http://schemas.microsoft.com/office/drawing/2010/main" xmlns="" w="9525">
                 <a:solidFill>
                   <a:schemeClr val="tx1"/>
                 </a:solidFill>
@@ -3641,7 +3642,7 @@
               </a14:hiddenLine>
             </a:ext>
             <a:ext uri="{AF507438-7753-43e0-B8FC-AC1667EBCBE1}">
-              <a14:hiddenEffects xmlns="" xmlns:a14="http://schemas.microsoft.com/office/drawing/2010/main">
+              <a14:hiddenEffects xmlns:a14="http://schemas.microsoft.com/office/drawing/2010/main" xmlns="">
                 <a:effectLst>
                   <a:outerShdw blurRad="63500" dist="38099" dir="2700000" algn="ctr" rotWithShape="0">
                     <a:schemeClr val="bg2">
@@ -3652,7 +3653,7 @@
               </a14:hiddenEffects>
             </a:ext>
             <a:ext uri="{FAA26D3D-D897-4be2-8F04-BA451C77F1D7}">
-              <ma14:placeholderFlag xmlns="" xmlns:ma14="http://schemas.microsoft.com/office/mac/drawingml/2011/main" val="1"/>
+              <ma14:placeholderFlag xmlns:ma14="http://schemas.microsoft.com/office/mac/drawingml/2011/main" xmlns="" val="1"/>
             </a:ext>
           </a:extLst>
         </p:spPr>
@@ -3796,7 +3797,7 @@
           <a:ln/>
           <a:extLst>
             <a:ext uri="{FAA26D3D-D897-4be2-8F04-BA451C77F1D7}">
-              <ma14:placeholderFlag xmlns="" xmlns:ma14="http://schemas.microsoft.com/office/mac/drawingml/2011/main" val="1"/>
+              <ma14:placeholderFlag xmlns:ma14="http://schemas.microsoft.com/office/mac/drawingml/2011/main" xmlns="" val="1"/>
             </a:ext>
           </a:extLst>
         </p:spPr>
@@ -4226,14 +4227,14 @@
         <p:spPr>
           <a:extLst>
             <a:ext uri="{909E8E84-426E-40dd-AFC4-6F175D3DCCD1}">
-              <a14:hiddenFill xmlns="" xmlns:a14="http://schemas.microsoft.com/office/drawing/2010/main">
+              <a14:hiddenFill xmlns:a14="http://schemas.microsoft.com/office/drawing/2010/main" xmlns="">
                 <a:solidFill>
                   <a:schemeClr val="accent1"/>
                 </a:solidFill>
               </a14:hiddenFill>
             </a:ext>
             <a:ext uri="{91240B29-F687-4f45-9708-019B960494DF}">
-              <a14:hiddenLine xmlns="" xmlns:a14="http://schemas.microsoft.com/office/drawing/2010/main" w="9525">
+              <a14:hiddenLine xmlns:a14="http://schemas.microsoft.com/office/drawing/2010/main" xmlns="" w="9525">
                 <a:solidFill>
                   <a:schemeClr val="tx1"/>
                 </a:solidFill>
@@ -4243,7 +4244,7 @@
               </a14:hiddenLine>
             </a:ext>
             <a:ext uri="{AF507438-7753-43e0-B8FC-AC1667EBCBE1}">
-              <a14:hiddenEffects xmlns="" xmlns:a14="http://schemas.microsoft.com/office/drawing/2010/main">
+              <a14:hiddenEffects xmlns:a14="http://schemas.microsoft.com/office/drawing/2010/main" xmlns="">
                 <a:effectLst>
                   <a:outerShdw blurRad="63500" dist="38099" dir="2700000" algn="ctr" rotWithShape="0">
                     <a:schemeClr val="bg2">
@@ -4254,7 +4255,7 @@
               </a14:hiddenEffects>
             </a:ext>
             <a:ext uri="{FAA26D3D-D897-4be2-8F04-BA451C77F1D7}">
-              <ma14:placeholderFlag xmlns="" xmlns:ma14="http://schemas.microsoft.com/office/mac/drawingml/2011/main" val="1"/>
+              <ma14:placeholderFlag xmlns:ma14="http://schemas.microsoft.com/office/mac/drawingml/2011/main" xmlns="" val="1"/>
             </a:ext>
           </a:extLst>
         </p:spPr>
@@ -4398,7 +4399,7 @@
           <a:ln/>
           <a:extLst>
             <a:ext uri="{FAA26D3D-D897-4be2-8F04-BA451C77F1D7}">
-              <ma14:placeholderFlag xmlns="" xmlns:ma14="http://schemas.microsoft.com/office/mac/drawingml/2011/main" val="1"/>
+              <ma14:placeholderFlag xmlns:ma14="http://schemas.microsoft.com/office/mac/drawingml/2011/main" xmlns="" val="1"/>
             </a:ext>
           </a:extLst>
         </p:spPr>
@@ -4483,14 +4484,14 @@
         <p:spPr>
           <a:extLst>
             <a:ext uri="{909E8E84-426E-40dd-AFC4-6F175D3DCCD1}">
-              <a14:hiddenFill xmlns="" xmlns:a14="http://schemas.microsoft.com/office/drawing/2010/main">
+              <a14:hiddenFill xmlns:a14="http://schemas.microsoft.com/office/drawing/2010/main" xmlns="">
                 <a:solidFill>
                   <a:schemeClr val="accent1"/>
                 </a:solidFill>
               </a14:hiddenFill>
             </a:ext>
             <a:ext uri="{91240B29-F687-4f45-9708-019B960494DF}">
-              <a14:hiddenLine xmlns="" xmlns:a14="http://schemas.microsoft.com/office/drawing/2010/main" w="9525">
+              <a14:hiddenLine xmlns:a14="http://schemas.microsoft.com/office/drawing/2010/main" xmlns="" w="9525">
                 <a:solidFill>
                   <a:schemeClr val="tx1"/>
                 </a:solidFill>
@@ -4500,7 +4501,7 @@
               </a14:hiddenLine>
             </a:ext>
             <a:ext uri="{AF507438-7753-43e0-B8FC-AC1667EBCBE1}">
-              <a14:hiddenEffects xmlns="" xmlns:a14="http://schemas.microsoft.com/office/drawing/2010/main">
+              <a14:hiddenEffects xmlns:a14="http://schemas.microsoft.com/office/drawing/2010/main" xmlns="">
                 <a:effectLst>
                   <a:outerShdw blurRad="63500" dist="38099" dir="2700000" algn="ctr" rotWithShape="0">
                     <a:schemeClr val="bg2">
@@ -4511,7 +4512,7 @@
               </a14:hiddenEffects>
             </a:ext>
             <a:ext uri="{FAA26D3D-D897-4be2-8F04-BA451C77F1D7}">
-              <ma14:placeholderFlag xmlns="" xmlns:ma14="http://schemas.microsoft.com/office/mac/drawingml/2011/main" val="1"/>
+              <ma14:placeholderFlag xmlns:ma14="http://schemas.microsoft.com/office/mac/drawingml/2011/main" xmlns="" val="1"/>
             </a:ext>
           </a:extLst>
         </p:spPr>
@@ -4655,7 +4656,7 @@
           <a:ln/>
           <a:extLst>
             <a:ext uri="{FAA26D3D-D897-4be2-8F04-BA451C77F1D7}">
-              <ma14:placeholderFlag xmlns="" xmlns:ma14="http://schemas.microsoft.com/office/mac/drawingml/2011/main" val="1"/>
+              <ma14:placeholderFlag xmlns:ma14="http://schemas.microsoft.com/office/mac/drawingml/2011/main" xmlns="" val="1"/>
             </a:ext>
           </a:extLst>
         </p:spPr>
@@ -4724,7 +4725,13 @@
   <p:cSld>
     <p:spTree>
       <p:nvGrpSpPr>
-        <p:cNvPr id="1" name=""/>
+        <p:cNvPr id="1" name="">
+          <a:extLst>
+            <a:ext uri="{FF2B5EF4-FFF2-40B4-BE49-F238E27FC236}">
+              <a16:creationId xmlns:a16="http://schemas.microsoft.com/office/drawing/2014/main" id="{55335FD8-D053-0690-A71F-7231AF4E7EBD}"/>
+            </a:ext>
+          </a:extLst>
+        </p:cNvPr>
         <p:cNvGrpSpPr/>
         <p:nvPr/>
       </p:nvGrpSpPr>
@@ -4741,7 +4748,7 @@
           <p:cNvPr id="7" name="Rectangle 7">
             <a:extLst>
               <a:ext uri="{FF2B5EF4-FFF2-40B4-BE49-F238E27FC236}">
-                <a16:creationId xmlns:a16="http://schemas.microsoft.com/office/drawing/2014/main" id="{212EF52A-8F5C-F342-A0AB-E04194AF50F2}"/>
+                <a16:creationId xmlns:a16="http://schemas.microsoft.com/office/drawing/2014/main" id="{91290445-B76B-D9BE-9FB1-0DFA9D3F65DC}"/>
               </a:ext>
             </a:extLst>
           </p:cNvPr>
@@ -4755,14 +4762,14 @@
         <p:spPr>
           <a:extLst>
             <a:ext uri="{909E8E84-426E-40dd-AFC4-6F175D3DCCD1}">
-              <a14:hiddenFill xmlns="" xmlns:a14="http://schemas.microsoft.com/office/drawing/2010/main">
+              <a14:hiddenFill xmlns:a14="http://schemas.microsoft.com/office/drawing/2010/main" xmlns="">
                 <a:solidFill>
                   <a:schemeClr val="accent1"/>
                 </a:solidFill>
               </a14:hiddenFill>
             </a:ext>
             <a:ext uri="{91240B29-F687-4f45-9708-019B960494DF}">
-              <a14:hiddenLine xmlns="" xmlns:a14="http://schemas.microsoft.com/office/drawing/2010/main" w="9525">
+              <a14:hiddenLine xmlns:a14="http://schemas.microsoft.com/office/drawing/2010/main" xmlns="" w="9525">
                 <a:solidFill>
                   <a:schemeClr val="tx1"/>
                 </a:solidFill>
@@ -4772,7 +4779,7 @@
               </a14:hiddenLine>
             </a:ext>
             <a:ext uri="{AF507438-7753-43e0-B8FC-AC1667EBCBE1}">
-              <a14:hiddenEffects xmlns="" xmlns:a14="http://schemas.microsoft.com/office/drawing/2010/main">
+              <a14:hiddenEffects xmlns:a14="http://schemas.microsoft.com/office/drawing/2010/main" xmlns="">
                 <a:effectLst>
                   <a:outerShdw blurRad="63500" dist="38099" dir="2700000" algn="ctr" rotWithShape="0">
                     <a:schemeClr val="bg2">
@@ -4783,7 +4790,7 @@
               </a14:hiddenEffects>
             </a:ext>
             <a:ext uri="{FAA26D3D-D897-4be2-8F04-BA451C77F1D7}">
-              <ma14:placeholderFlag xmlns="" xmlns:ma14="http://schemas.microsoft.com/office/mac/drawingml/2011/main" val="1"/>
+              <ma14:placeholderFlag xmlns:ma14="http://schemas.microsoft.com/office/mac/drawingml/2011/main" xmlns="" val="1"/>
             </a:ext>
           </a:extLst>
         </p:spPr>
@@ -4898,7 +4905,7 @@
           </a:lstStyle>
           <a:p>
             <a:pPr eaLnBrk="1" hangingPunct="1"/>
-            <a:fld id="{860D089F-C2E2-FF49-895B-BD05CA4A7FDD}" type="slidenum">
+            <a:fld id="{57EDFF98-CD5C-3042-8748-114346698EAD}" type="slidenum">
               <a:rPr lang="en-US" altLang="en-US" sz="1200"/>
               <a:pPr eaLnBrk="1" hangingPunct="1"/>
               <a:t>22</a:t>
@@ -4909,10 +4916,10 @@
       </p:sp>
       <p:sp>
         <p:nvSpPr>
-          <p:cNvPr id="922626" name="Rectangle 2">
+          <p:cNvPr id="920578" name="Rectangle 2">
             <a:extLst>
               <a:ext uri="{FF2B5EF4-FFF2-40B4-BE49-F238E27FC236}">
-                <a16:creationId xmlns:a16="http://schemas.microsoft.com/office/drawing/2014/main" id="{D8C6EBD1-E136-C749-83E1-B3ADD87ABE24}"/>
+                <a16:creationId xmlns:a16="http://schemas.microsoft.com/office/drawing/2014/main" id="{25657115-8AA1-A519-64E2-0D1AAD8DCECF}"/>
               </a:ext>
             </a:extLst>
           </p:cNvPr>
@@ -4927,17 +4934,17 @@
           <a:ln/>
           <a:extLst>
             <a:ext uri="{FAA26D3D-D897-4be2-8F04-BA451C77F1D7}">
-              <ma14:placeholderFlag xmlns="" xmlns:ma14="http://schemas.microsoft.com/office/mac/drawingml/2011/main" val="1"/>
+              <ma14:placeholderFlag xmlns:ma14="http://schemas.microsoft.com/office/mac/drawingml/2011/main" xmlns="" val="1"/>
             </a:ext>
           </a:extLst>
         </p:spPr>
       </p:sp>
       <p:sp>
         <p:nvSpPr>
-          <p:cNvPr id="922627" name="Rectangle 3">
+          <p:cNvPr id="920579" name="Rectangle 3">
             <a:extLst>
               <a:ext uri="{FF2B5EF4-FFF2-40B4-BE49-F238E27FC236}">
-                <a16:creationId xmlns:a16="http://schemas.microsoft.com/office/drawing/2014/main" id="{11AF6475-BDB5-DD46-A62D-855D6F996D03}"/>
+                <a16:creationId xmlns:a16="http://schemas.microsoft.com/office/drawing/2014/main" id="{4458C747-2F1A-1E61-3C9C-0BB742AB4C91}"/>
               </a:ext>
             </a:extLst>
           </p:cNvPr>
@@ -4960,12 +4967,28 @@
               <a:cs typeface="Calibri"/>
             </a:endParaRPr>
           </a:p>
+          <a:p>
+            <a:pPr eaLnBrk="1" hangingPunct="1">
+              <a:defRPr/>
+            </a:pPr>
+            <a:endParaRPr lang="en-US" dirty="0">
+              <a:cs typeface="Calibri"/>
+            </a:endParaRPr>
+          </a:p>
+          <a:p>
+            <a:pPr eaLnBrk="1" hangingPunct="1">
+              <a:defRPr/>
+            </a:pPr>
+            <a:endParaRPr lang="en-US" dirty="0">
+              <a:cs typeface="Calibri"/>
+            </a:endParaRPr>
+          </a:p>
         </p:txBody>
       </p:sp>
     </p:spTree>
     <p:extLst>
       <p:ext uri="{BB962C8B-B14F-4D97-AF65-F5344CB8AC3E}">
-        <p14:creationId xmlns:p14="http://schemas.microsoft.com/office/powerpoint/2010/main" val="1773106479"/>
+        <p14:creationId xmlns:p14="http://schemas.microsoft.com/office/powerpoint/2010/main" val="369036083"/>
       </p:ext>
     </p:extLst>
   </p:cSld>
@@ -5011,14 +5034,14 @@
         <p:spPr>
           <a:extLst>
             <a:ext uri="{909E8E84-426E-40dd-AFC4-6F175D3DCCD1}">
-              <a14:hiddenFill xmlns="" xmlns:a14="http://schemas.microsoft.com/office/drawing/2010/main">
+              <a14:hiddenFill xmlns:a14="http://schemas.microsoft.com/office/drawing/2010/main" xmlns="">
                 <a:solidFill>
                   <a:schemeClr val="accent1"/>
                 </a:solidFill>
               </a14:hiddenFill>
             </a:ext>
             <a:ext uri="{91240B29-F687-4f45-9708-019B960494DF}">
-              <a14:hiddenLine xmlns="" xmlns:a14="http://schemas.microsoft.com/office/drawing/2010/main" w="9525">
+              <a14:hiddenLine xmlns:a14="http://schemas.microsoft.com/office/drawing/2010/main" xmlns="" w="9525">
                 <a:solidFill>
                   <a:schemeClr val="tx1"/>
                 </a:solidFill>
@@ -5028,7 +5051,7 @@
               </a14:hiddenLine>
             </a:ext>
             <a:ext uri="{AF507438-7753-43e0-B8FC-AC1667EBCBE1}">
-              <a14:hiddenEffects xmlns="" xmlns:a14="http://schemas.microsoft.com/office/drawing/2010/main">
+              <a14:hiddenEffects xmlns:a14="http://schemas.microsoft.com/office/drawing/2010/main" xmlns="">
                 <a:effectLst>
                   <a:outerShdw blurRad="63500" dist="38099" dir="2700000" algn="ctr" rotWithShape="0">
                     <a:schemeClr val="bg2">
@@ -5039,7 +5062,7 @@
               </a14:hiddenEffects>
             </a:ext>
             <a:ext uri="{FAA26D3D-D897-4be2-8F04-BA451C77F1D7}">
-              <ma14:placeholderFlag xmlns="" xmlns:ma14="http://schemas.microsoft.com/office/mac/drawingml/2011/main" val="1"/>
+              <ma14:placeholderFlag xmlns:ma14="http://schemas.microsoft.com/office/mac/drawingml/2011/main" xmlns="" val="1"/>
             </a:ext>
           </a:extLst>
         </p:spPr>
@@ -5183,7 +5206,7 @@
           <a:ln/>
           <a:extLst>
             <a:ext uri="{FAA26D3D-D897-4be2-8F04-BA451C77F1D7}">
-              <ma14:placeholderFlag xmlns="" xmlns:ma14="http://schemas.microsoft.com/office/mac/drawingml/2011/main" val="1"/>
+              <ma14:placeholderFlag xmlns:ma14="http://schemas.microsoft.com/office/mac/drawingml/2011/main" xmlns="" val="1"/>
             </a:ext>
           </a:extLst>
         </p:spPr>
@@ -5267,14 +5290,14 @@
         <p:spPr>
           <a:extLst>
             <a:ext uri="{909E8E84-426E-40dd-AFC4-6F175D3DCCD1}">
-              <a14:hiddenFill xmlns="" xmlns:a14="http://schemas.microsoft.com/office/drawing/2010/main">
+              <a14:hiddenFill xmlns:a14="http://schemas.microsoft.com/office/drawing/2010/main" xmlns="">
                 <a:solidFill>
                   <a:schemeClr val="accent1"/>
                 </a:solidFill>
               </a14:hiddenFill>
             </a:ext>
             <a:ext uri="{91240B29-F687-4f45-9708-019B960494DF}">
-              <a14:hiddenLine xmlns="" xmlns:a14="http://schemas.microsoft.com/office/drawing/2010/main" w="9525">
+              <a14:hiddenLine xmlns:a14="http://schemas.microsoft.com/office/drawing/2010/main" xmlns="" w="9525">
                 <a:solidFill>
                   <a:schemeClr val="tx1"/>
                 </a:solidFill>
@@ -5284,7 +5307,7 @@
               </a14:hiddenLine>
             </a:ext>
             <a:ext uri="{AF507438-7753-43e0-B8FC-AC1667EBCBE1}">
-              <a14:hiddenEffects xmlns="" xmlns:a14="http://schemas.microsoft.com/office/drawing/2010/main">
+              <a14:hiddenEffects xmlns:a14="http://schemas.microsoft.com/office/drawing/2010/main" xmlns="">
                 <a:effectLst>
                   <a:outerShdw blurRad="63500" dist="38099" dir="2700000" algn="ctr" rotWithShape="0">
                     <a:schemeClr val="bg2">
@@ -5295,7 +5318,7 @@
               </a14:hiddenEffects>
             </a:ext>
             <a:ext uri="{FAA26D3D-D897-4be2-8F04-BA451C77F1D7}">
-              <ma14:placeholderFlag xmlns="" xmlns:ma14="http://schemas.microsoft.com/office/mac/drawingml/2011/main" val="1"/>
+              <ma14:placeholderFlag xmlns:ma14="http://schemas.microsoft.com/office/mac/drawingml/2011/main" xmlns="" val="1"/>
             </a:ext>
           </a:extLst>
         </p:spPr>
@@ -5439,7 +5462,7 @@
           <a:ln/>
           <a:extLst>
             <a:ext uri="{FAA26D3D-D897-4be2-8F04-BA451C77F1D7}">
-              <ma14:placeholderFlag xmlns="" xmlns:ma14="http://schemas.microsoft.com/office/mac/drawingml/2011/main" val="1"/>
+              <ma14:placeholderFlag xmlns:ma14="http://schemas.microsoft.com/office/mac/drawingml/2011/main" xmlns="" val="1"/>
             </a:ext>
           </a:extLst>
         </p:spPr>
@@ -5550,14 +5573,14 @@
         <p:spPr>
           <a:extLst>
             <a:ext uri="{909E8E84-426E-40dd-AFC4-6F175D3DCCD1}">
-              <a14:hiddenFill xmlns="" xmlns:a14="http://schemas.microsoft.com/office/drawing/2010/main">
+              <a14:hiddenFill xmlns:a14="http://schemas.microsoft.com/office/drawing/2010/main" xmlns="">
                 <a:solidFill>
                   <a:schemeClr val="accent1"/>
                 </a:solidFill>
               </a14:hiddenFill>
             </a:ext>
             <a:ext uri="{91240B29-F687-4f45-9708-019B960494DF}">
-              <a14:hiddenLine xmlns="" xmlns:a14="http://schemas.microsoft.com/office/drawing/2010/main" w="9525">
+              <a14:hiddenLine xmlns:a14="http://schemas.microsoft.com/office/drawing/2010/main" xmlns="" w="9525">
                 <a:solidFill>
                   <a:schemeClr val="tx1"/>
                 </a:solidFill>
@@ -5567,7 +5590,7 @@
               </a14:hiddenLine>
             </a:ext>
             <a:ext uri="{AF507438-7753-43e0-B8FC-AC1667EBCBE1}">
-              <a14:hiddenEffects xmlns="" xmlns:a14="http://schemas.microsoft.com/office/drawing/2010/main">
+              <a14:hiddenEffects xmlns:a14="http://schemas.microsoft.com/office/drawing/2010/main" xmlns="">
                 <a:effectLst>
                   <a:outerShdw blurRad="63500" dist="38099" dir="2700000" algn="ctr" rotWithShape="0">
                     <a:schemeClr val="bg2">
@@ -5578,7 +5601,7 @@
               </a14:hiddenEffects>
             </a:ext>
             <a:ext uri="{FAA26D3D-D897-4be2-8F04-BA451C77F1D7}">
-              <ma14:placeholderFlag xmlns="" xmlns:ma14="http://schemas.microsoft.com/office/mac/drawingml/2011/main" val="1"/>
+              <ma14:placeholderFlag xmlns:ma14="http://schemas.microsoft.com/office/mac/drawingml/2011/main" xmlns="" val="1"/>
             </a:ext>
           </a:extLst>
         </p:spPr>
@@ -5722,7 +5745,7 @@
           <a:ln/>
           <a:extLst>
             <a:ext uri="{FAA26D3D-D897-4be2-8F04-BA451C77F1D7}">
-              <ma14:placeholderFlag xmlns="" xmlns:ma14="http://schemas.microsoft.com/office/mac/drawingml/2011/main" val="1"/>
+              <ma14:placeholderFlag xmlns:ma14="http://schemas.microsoft.com/office/mac/drawingml/2011/main" xmlns="" val="1"/>
             </a:ext>
           </a:extLst>
         </p:spPr>
@@ -5874,14 +5897,14 @@
         <p:spPr>
           <a:extLst>
             <a:ext uri="{909E8E84-426E-40dd-AFC4-6F175D3DCCD1}">
-              <a14:hiddenFill xmlns="" xmlns:a14="http://schemas.microsoft.com/office/drawing/2010/main">
+              <a14:hiddenFill xmlns:a14="http://schemas.microsoft.com/office/drawing/2010/main" xmlns="">
                 <a:solidFill>
                   <a:schemeClr val="accent1"/>
                 </a:solidFill>
               </a14:hiddenFill>
             </a:ext>
             <a:ext uri="{91240B29-F687-4f45-9708-019B960494DF}">
-              <a14:hiddenLine xmlns="" xmlns:a14="http://schemas.microsoft.com/office/drawing/2010/main" w="9525">
+              <a14:hiddenLine xmlns:a14="http://schemas.microsoft.com/office/drawing/2010/main" xmlns="" w="9525">
                 <a:solidFill>
                   <a:schemeClr val="tx1"/>
                 </a:solidFill>
@@ -5891,7 +5914,7 @@
               </a14:hiddenLine>
             </a:ext>
             <a:ext uri="{AF507438-7753-43e0-B8FC-AC1667EBCBE1}">
-              <a14:hiddenEffects xmlns="" xmlns:a14="http://schemas.microsoft.com/office/drawing/2010/main">
+              <a14:hiddenEffects xmlns:a14="http://schemas.microsoft.com/office/drawing/2010/main" xmlns="">
                 <a:effectLst>
                   <a:outerShdw blurRad="63500" dist="38099" dir="2700000" algn="ctr" rotWithShape="0">
                     <a:schemeClr val="bg2">
@@ -5902,7 +5925,7 @@
               </a14:hiddenEffects>
             </a:ext>
             <a:ext uri="{FAA26D3D-D897-4be2-8F04-BA451C77F1D7}">
-              <ma14:placeholderFlag xmlns="" xmlns:ma14="http://schemas.microsoft.com/office/mac/drawingml/2011/main" val="1"/>
+              <ma14:placeholderFlag xmlns:ma14="http://schemas.microsoft.com/office/mac/drawingml/2011/main" xmlns="" val="1"/>
             </a:ext>
           </a:extLst>
         </p:spPr>
@@ -6046,7 +6069,7 @@
           <a:ln/>
           <a:extLst>
             <a:ext uri="{FAA26D3D-D897-4be2-8F04-BA451C77F1D7}">
-              <ma14:placeholderFlag xmlns="" xmlns:ma14="http://schemas.microsoft.com/office/mac/drawingml/2011/main" val="1"/>
+              <ma14:placeholderFlag xmlns:ma14="http://schemas.microsoft.com/office/mac/drawingml/2011/main" xmlns="" val="1"/>
             </a:ext>
           </a:extLst>
         </p:spPr>
@@ -6130,14 +6153,14 @@
         <p:spPr>
           <a:extLst>
             <a:ext uri="{909E8E84-426E-40dd-AFC4-6F175D3DCCD1}">
-              <a14:hiddenFill xmlns="" xmlns:a14="http://schemas.microsoft.com/office/drawing/2010/main">
+              <a14:hiddenFill xmlns:a14="http://schemas.microsoft.com/office/drawing/2010/main" xmlns="">
                 <a:solidFill>
                   <a:schemeClr val="accent1"/>
                 </a:solidFill>
               </a14:hiddenFill>
             </a:ext>
             <a:ext uri="{91240B29-F687-4f45-9708-019B960494DF}">
-              <a14:hiddenLine xmlns="" xmlns:a14="http://schemas.microsoft.com/office/drawing/2010/main" w="9525">
+              <a14:hiddenLine xmlns:a14="http://schemas.microsoft.com/office/drawing/2010/main" xmlns="" w="9525">
                 <a:solidFill>
                   <a:schemeClr val="tx1"/>
                 </a:solidFill>
@@ -6147,7 +6170,7 @@
               </a14:hiddenLine>
             </a:ext>
             <a:ext uri="{AF507438-7753-43e0-B8FC-AC1667EBCBE1}">
-              <a14:hiddenEffects xmlns="" xmlns:a14="http://schemas.microsoft.com/office/drawing/2010/main">
+              <a14:hiddenEffects xmlns:a14="http://schemas.microsoft.com/office/drawing/2010/main" xmlns="">
                 <a:effectLst>
                   <a:outerShdw blurRad="63500" dist="38099" dir="2700000" algn="ctr" rotWithShape="0">
                     <a:schemeClr val="bg2">
@@ -6158,7 +6181,7 @@
               </a14:hiddenEffects>
             </a:ext>
             <a:ext uri="{FAA26D3D-D897-4be2-8F04-BA451C77F1D7}">
-              <ma14:placeholderFlag xmlns="" xmlns:ma14="http://schemas.microsoft.com/office/mac/drawingml/2011/main" val="1"/>
+              <ma14:placeholderFlag xmlns:ma14="http://schemas.microsoft.com/office/mac/drawingml/2011/main" xmlns="" val="1"/>
             </a:ext>
           </a:extLst>
         </p:spPr>
@@ -6302,7 +6325,7 @@
           <a:ln/>
           <a:extLst>
             <a:ext uri="{FAA26D3D-D897-4be2-8F04-BA451C77F1D7}">
-              <ma14:placeholderFlag xmlns="" xmlns:ma14="http://schemas.microsoft.com/office/mac/drawingml/2011/main" val="1"/>
+              <ma14:placeholderFlag xmlns:ma14="http://schemas.microsoft.com/office/mac/drawingml/2011/main" xmlns="" val="1"/>
             </a:ext>
           </a:extLst>
         </p:spPr>
@@ -6386,14 +6409,14 @@
         <p:spPr>
           <a:extLst>
             <a:ext uri="{909E8E84-426E-40dd-AFC4-6F175D3DCCD1}">
-              <a14:hiddenFill xmlns="" xmlns:a14="http://schemas.microsoft.com/office/drawing/2010/main">
+              <a14:hiddenFill xmlns:a14="http://schemas.microsoft.com/office/drawing/2010/main" xmlns="">
                 <a:solidFill>
                   <a:schemeClr val="accent1"/>
                 </a:solidFill>
               </a14:hiddenFill>
             </a:ext>
             <a:ext uri="{91240B29-F687-4f45-9708-019B960494DF}">
-              <a14:hiddenLine xmlns="" xmlns:a14="http://schemas.microsoft.com/office/drawing/2010/main" w="9525">
+              <a14:hiddenLine xmlns:a14="http://schemas.microsoft.com/office/drawing/2010/main" xmlns="" w="9525">
                 <a:solidFill>
                   <a:schemeClr val="tx1"/>
                 </a:solidFill>
@@ -6403,7 +6426,7 @@
               </a14:hiddenLine>
             </a:ext>
             <a:ext uri="{AF507438-7753-43e0-B8FC-AC1667EBCBE1}">
-              <a14:hiddenEffects xmlns="" xmlns:a14="http://schemas.microsoft.com/office/drawing/2010/main">
+              <a14:hiddenEffects xmlns:a14="http://schemas.microsoft.com/office/drawing/2010/main" xmlns="">
                 <a:effectLst>
                   <a:outerShdw blurRad="63500" dist="38099" dir="2700000" algn="ctr" rotWithShape="0">
                     <a:schemeClr val="bg2">
@@ -6414,7 +6437,7 @@
               </a14:hiddenEffects>
             </a:ext>
             <a:ext uri="{FAA26D3D-D897-4be2-8F04-BA451C77F1D7}">
-              <ma14:placeholderFlag xmlns="" xmlns:ma14="http://schemas.microsoft.com/office/mac/drawingml/2011/main" val="1"/>
+              <ma14:placeholderFlag xmlns:ma14="http://schemas.microsoft.com/office/mac/drawingml/2011/main" xmlns="" val="1"/>
             </a:ext>
           </a:extLst>
         </p:spPr>
@@ -6558,7 +6581,7 @@
           <a:ln/>
           <a:extLst>
             <a:ext uri="{FAA26D3D-D897-4be2-8F04-BA451C77F1D7}">
-              <ma14:placeholderFlag xmlns="" xmlns:ma14="http://schemas.microsoft.com/office/mac/drawingml/2011/main" val="1"/>
+              <ma14:placeholderFlag xmlns:ma14="http://schemas.microsoft.com/office/mac/drawingml/2011/main" xmlns="" val="1"/>
             </a:ext>
           </a:extLst>
         </p:spPr>
@@ -6655,14 +6678,14 @@
         <p:spPr>
           <a:extLst>
             <a:ext uri="{909E8E84-426E-40dd-AFC4-6F175D3DCCD1}">
-              <a14:hiddenFill xmlns="" xmlns:a14="http://schemas.microsoft.com/office/drawing/2010/main">
+              <a14:hiddenFill xmlns:a14="http://schemas.microsoft.com/office/drawing/2010/main" xmlns="">
                 <a:solidFill>
                   <a:schemeClr val="accent1"/>
                 </a:solidFill>
               </a14:hiddenFill>
             </a:ext>
             <a:ext uri="{91240B29-F687-4f45-9708-019B960494DF}">
-              <a14:hiddenLine xmlns="" xmlns:a14="http://schemas.microsoft.com/office/drawing/2010/main" w="9525">
+              <a14:hiddenLine xmlns:a14="http://schemas.microsoft.com/office/drawing/2010/main" xmlns="" w="9525">
                 <a:solidFill>
                   <a:schemeClr val="tx1"/>
                 </a:solidFill>
@@ -6672,7 +6695,7 @@
               </a14:hiddenLine>
             </a:ext>
             <a:ext uri="{AF507438-7753-43e0-B8FC-AC1667EBCBE1}">
-              <a14:hiddenEffects xmlns="" xmlns:a14="http://schemas.microsoft.com/office/drawing/2010/main">
+              <a14:hiddenEffects xmlns:a14="http://schemas.microsoft.com/office/drawing/2010/main" xmlns="">
                 <a:effectLst>
                   <a:outerShdw blurRad="63500" dist="38099" dir="2700000" algn="ctr" rotWithShape="0">
                     <a:schemeClr val="bg2">
@@ -6683,7 +6706,7 @@
               </a14:hiddenEffects>
             </a:ext>
             <a:ext uri="{FAA26D3D-D897-4be2-8F04-BA451C77F1D7}">
-              <ma14:placeholderFlag xmlns="" xmlns:ma14="http://schemas.microsoft.com/office/mac/drawingml/2011/main" val="1"/>
+              <ma14:placeholderFlag xmlns:ma14="http://schemas.microsoft.com/office/mac/drawingml/2011/main" xmlns="" val="1"/>
             </a:ext>
           </a:extLst>
         </p:spPr>
@@ -6827,7 +6850,7 @@
           <a:ln/>
           <a:extLst>
             <a:ext uri="{FAA26D3D-D897-4be2-8F04-BA451C77F1D7}">
-              <ma14:placeholderFlag xmlns="" xmlns:ma14="http://schemas.microsoft.com/office/mac/drawingml/2011/main" val="1"/>
+              <ma14:placeholderFlag xmlns:ma14="http://schemas.microsoft.com/office/mac/drawingml/2011/main" xmlns="" val="1"/>
             </a:ext>
           </a:extLst>
         </p:spPr>
@@ -6942,14 +6965,14 @@
         <p:spPr>
           <a:extLst>
             <a:ext uri="{909E8E84-426E-40dd-AFC4-6F175D3DCCD1}">
-              <a14:hiddenFill xmlns="" xmlns:a14="http://schemas.microsoft.com/office/drawing/2010/main">
+              <a14:hiddenFill xmlns:a14="http://schemas.microsoft.com/office/drawing/2010/main" xmlns="">
                 <a:solidFill>
                   <a:schemeClr val="accent1"/>
                 </a:solidFill>
               </a14:hiddenFill>
             </a:ext>
             <a:ext uri="{91240B29-F687-4f45-9708-019B960494DF}">
-              <a14:hiddenLine xmlns="" xmlns:a14="http://schemas.microsoft.com/office/drawing/2010/main" w="9525">
+              <a14:hiddenLine xmlns:a14="http://schemas.microsoft.com/office/drawing/2010/main" xmlns="" w="9525">
                 <a:solidFill>
                   <a:schemeClr val="tx1"/>
                 </a:solidFill>
@@ -6959,7 +6982,7 @@
               </a14:hiddenLine>
             </a:ext>
             <a:ext uri="{AF507438-7753-43e0-B8FC-AC1667EBCBE1}">
-              <a14:hiddenEffects xmlns="" xmlns:a14="http://schemas.microsoft.com/office/drawing/2010/main">
+              <a14:hiddenEffects xmlns:a14="http://schemas.microsoft.com/office/drawing/2010/main" xmlns="">
                 <a:effectLst>
                   <a:outerShdw blurRad="63500" dist="38099" dir="2700000" algn="ctr" rotWithShape="0">
                     <a:schemeClr val="bg2">
@@ -6970,7 +6993,7 @@
               </a14:hiddenEffects>
             </a:ext>
             <a:ext uri="{FAA26D3D-D897-4be2-8F04-BA451C77F1D7}">
-              <ma14:placeholderFlag xmlns="" xmlns:ma14="http://schemas.microsoft.com/office/mac/drawingml/2011/main" val="1"/>
+              <ma14:placeholderFlag xmlns:ma14="http://schemas.microsoft.com/office/mac/drawingml/2011/main" xmlns="" val="1"/>
             </a:ext>
           </a:extLst>
         </p:spPr>
@@ -7114,7 +7137,7 @@
           <a:ln/>
           <a:extLst>
             <a:ext uri="{FAA26D3D-D897-4be2-8F04-BA451C77F1D7}">
-              <ma14:placeholderFlag xmlns="" xmlns:ma14="http://schemas.microsoft.com/office/mac/drawingml/2011/main" val="1"/>
+              <ma14:placeholderFlag xmlns:ma14="http://schemas.microsoft.com/office/mac/drawingml/2011/main" xmlns="" val="1"/>
             </a:ext>
           </a:extLst>
         </p:spPr>
@@ -7281,14 +7304,14 @@
         <p:spPr>
           <a:extLst>
             <a:ext uri="{909E8E84-426E-40dd-AFC4-6F175D3DCCD1}">
-              <a14:hiddenFill xmlns="" xmlns:a14="http://schemas.microsoft.com/office/drawing/2010/main">
+              <a14:hiddenFill xmlns:a14="http://schemas.microsoft.com/office/drawing/2010/main" xmlns="">
                 <a:solidFill>
                   <a:schemeClr val="accent1"/>
                 </a:solidFill>
               </a14:hiddenFill>
             </a:ext>
             <a:ext uri="{91240B29-F687-4f45-9708-019B960494DF}">
-              <a14:hiddenLine xmlns="" xmlns:a14="http://schemas.microsoft.com/office/drawing/2010/main" w="9525">
+              <a14:hiddenLine xmlns:a14="http://schemas.microsoft.com/office/drawing/2010/main" xmlns="" w="9525">
                 <a:solidFill>
                   <a:schemeClr val="tx1"/>
                 </a:solidFill>
@@ -7298,7 +7321,7 @@
               </a14:hiddenLine>
             </a:ext>
             <a:ext uri="{AF507438-7753-43e0-B8FC-AC1667EBCBE1}">
-              <a14:hiddenEffects xmlns="" xmlns:a14="http://schemas.microsoft.com/office/drawing/2010/main">
+              <a14:hiddenEffects xmlns:a14="http://schemas.microsoft.com/office/drawing/2010/main" xmlns="">
                 <a:effectLst>
                   <a:outerShdw blurRad="63500" dist="38099" dir="2700000" algn="ctr" rotWithShape="0">
                     <a:schemeClr val="bg2">
@@ -7309,7 +7332,7 @@
               </a14:hiddenEffects>
             </a:ext>
             <a:ext uri="{FAA26D3D-D897-4be2-8F04-BA451C77F1D7}">
-              <ma14:placeholderFlag xmlns="" xmlns:ma14="http://schemas.microsoft.com/office/mac/drawingml/2011/main" val="1"/>
+              <ma14:placeholderFlag xmlns:ma14="http://schemas.microsoft.com/office/mac/drawingml/2011/main" xmlns="" val="1"/>
             </a:ext>
           </a:extLst>
         </p:spPr>
@@ -7453,7 +7476,7 @@
           <a:ln/>
           <a:extLst>
             <a:ext uri="{FAA26D3D-D897-4be2-8F04-BA451C77F1D7}">
-              <ma14:placeholderFlag xmlns="" xmlns:ma14="http://schemas.microsoft.com/office/mac/drawingml/2011/main" val="1"/>
+              <ma14:placeholderFlag xmlns:ma14="http://schemas.microsoft.com/office/mac/drawingml/2011/main" xmlns="" val="1"/>
             </a:ext>
           </a:extLst>
         </p:spPr>
@@ -7769,14 +7792,14 @@
         <p:spPr>
           <a:extLst>
             <a:ext uri="{909E8E84-426E-40dd-AFC4-6F175D3DCCD1}">
-              <a14:hiddenFill xmlns="" xmlns:a14="http://schemas.microsoft.com/office/drawing/2010/main">
+              <a14:hiddenFill xmlns:a14="http://schemas.microsoft.com/office/drawing/2010/main" xmlns="">
                 <a:solidFill>
                   <a:schemeClr val="accent1"/>
                 </a:solidFill>
               </a14:hiddenFill>
             </a:ext>
             <a:ext uri="{91240B29-F687-4f45-9708-019B960494DF}">
-              <a14:hiddenLine xmlns="" xmlns:a14="http://schemas.microsoft.com/office/drawing/2010/main" w="9525">
+              <a14:hiddenLine xmlns:a14="http://schemas.microsoft.com/office/drawing/2010/main" xmlns="" w="9525">
                 <a:solidFill>
                   <a:schemeClr val="tx1"/>
                 </a:solidFill>
@@ -7786,7 +7809,7 @@
               </a14:hiddenLine>
             </a:ext>
             <a:ext uri="{AF507438-7753-43e0-B8FC-AC1667EBCBE1}">
-              <a14:hiddenEffects xmlns="" xmlns:a14="http://schemas.microsoft.com/office/drawing/2010/main">
+              <a14:hiddenEffects xmlns:a14="http://schemas.microsoft.com/office/drawing/2010/main" xmlns="">
                 <a:effectLst>
                   <a:outerShdw blurRad="63500" dist="38099" dir="2700000" algn="ctr" rotWithShape="0">
                     <a:schemeClr val="bg2">
@@ -7797,7 +7820,7 @@
               </a14:hiddenEffects>
             </a:ext>
             <a:ext uri="{FAA26D3D-D897-4be2-8F04-BA451C77F1D7}">
-              <ma14:placeholderFlag xmlns="" xmlns:ma14="http://schemas.microsoft.com/office/mac/drawingml/2011/main" val="1"/>
+              <ma14:placeholderFlag xmlns:ma14="http://schemas.microsoft.com/office/mac/drawingml/2011/main" xmlns="" val="1"/>
             </a:ext>
           </a:extLst>
         </p:spPr>
@@ -7941,7 +7964,7 @@
           <a:ln/>
           <a:extLst>
             <a:ext uri="{FAA26D3D-D897-4be2-8F04-BA451C77F1D7}">
-              <ma14:placeholderFlag xmlns="" xmlns:ma14="http://schemas.microsoft.com/office/mac/drawingml/2011/main" val="1"/>
+              <ma14:placeholderFlag xmlns:ma14="http://schemas.microsoft.com/office/mac/drawingml/2011/main" xmlns="" val="1"/>
             </a:ext>
           </a:extLst>
         </p:spPr>
@@ -8069,14 +8092,14 @@
         <p:spPr>
           <a:extLst>
             <a:ext uri="{909E8E84-426E-40dd-AFC4-6F175D3DCCD1}">
-              <a14:hiddenFill xmlns="" xmlns:a14="http://schemas.microsoft.com/office/drawing/2010/main">
+              <a14:hiddenFill xmlns:a14="http://schemas.microsoft.com/office/drawing/2010/main" xmlns="">
                 <a:solidFill>
                   <a:schemeClr val="accent1"/>
                 </a:solidFill>
               </a14:hiddenFill>
             </a:ext>
             <a:ext uri="{91240B29-F687-4f45-9708-019B960494DF}">
-              <a14:hiddenLine xmlns="" xmlns:a14="http://schemas.microsoft.com/office/drawing/2010/main" w="9525">
+              <a14:hiddenLine xmlns:a14="http://schemas.microsoft.com/office/drawing/2010/main" xmlns="" w="9525">
                 <a:solidFill>
                   <a:schemeClr val="tx1"/>
                 </a:solidFill>
@@ -8086,7 +8109,7 @@
               </a14:hiddenLine>
             </a:ext>
             <a:ext uri="{AF507438-7753-43e0-B8FC-AC1667EBCBE1}">
-              <a14:hiddenEffects xmlns="" xmlns:a14="http://schemas.microsoft.com/office/drawing/2010/main">
+              <a14:hiddenEffects xmlns:a14="http://schemas.microsoft.com/office/drawing/2010/main" xmlns="">
                 <a:effectLst>
                   <a:outerShdw blurRad="63500" dist="38099" dir="2700000" algn="ctr" rotWithShape="0">
                     <a:schemeClr val="bg2">
@@ -8097,7 +8120,7 @@
               </a14:hiddenEffects>
             </a:ext>
             <a:ext uri="{FAA26D3D-D897-4be2-8F04-BA451C77F1D7}">
-              <ma14:placeholderFlag xmlns="" xmlns:ma14="http://schemas.microsoft.com/office/mac/drawingml/2011/main" val="1"/>
+              <ma14:placeholderFlag xmlns:ma14="http://schemas.microsoft.com/office/mac/drawingml/2011/main" xmlns="" val="1"/>
             </a:ext>
           </a:extLst>
         </p:spPr>
@@ -8241,7 +8264,7 @@
           <a:ln/>
           <a:extLst>
             <a:ext uri="{FAA26D3D-D897-4be2-8F04-BA451C77F1D7}">
-              <ma14:placeholderFlag xmlns="" xmlns:ma14="http://schemas.microsoft.com/office/mac/drawingml/2011/main" val="1"/>
+              <ma14:placeholderFlag xmlns:ma14="http://schemas.microsoft.com/office/mac/drawingml/2011/main" xmlns="" val="1"/>
             </a:ext>
           </a:extLst>
         </p:spPr>
@@ -8364,14 +8387,14 @@
         <p:spPr>
           <a:extLst>
             <a:ext uri="{909E8E84-426E-40dd-AFC4-6F175D3DCCD1}">
-              <a14:hiddenFill xmlns="" xmlns:a14="http://schemas.microsoft.com/office/drawing/2010/main">
+              <a14:hiddenFill xmlns:a14="http://schemas.microsoft.com/office/drawing/2010/main" xmlns="">
                 <a:solidFill>
                   <a:schemeClr val="accent1"/>
                 </a:solidFill>
               </a14:hiddenFill>
             </a:ext>
             <a:ext uri="{91240B29-F687-4f45-9708-019B960494DF}">
-              <a14:hiddenLine xmlns="" xmlns:a14="http://schemas.microsoft.com/office/drawing/2010/main" w="9525">
+              <a14:hiddenLine xmlns:a14="http://schemas.microsoft.com/office/drawing/2010/main" xmlns="" w="9525">
                 <a:solidFill>
                   <a:schemeClr val="tx1"/>
                 </a:solidFill>
@@ -8381,7 +8404,7 @@
               </a14:hiddenLine>
             </a:ext>
             <a:ext uri="{AF507438-7753-43e0-B8FC-AC1667EBCBE1}">
-              <a14:hiddenEffects xmlns="" xmlns:a14="http://schemas.microsoft.com/office/drawing/2010/main">
+              <a14:hiddenEffects xmlns:a14="http://schemas.microsoft.com/office/drawing/2010/main" xmlns="">
                 <a:effectLst>
                   <a:outerShdw blurRad="63500" dist="38099" dir="2700000" algn="ctr" rotWithShape="0">
                     <a:schemeClr val="bg2">
@@ -8392,7 +8415,7 @@
               </a14:hiddenEffects>
             </a:ext>
             <a:ext uri="{FAA26D3D-D897-4be2-8F04-BA451C77F1D7}">
-              <ma14:placeholderFlag xmlns="" xmlns:ma14="http://schemas.microsoft.com/office/mac/drawingml/2011/main" val="1"/>
+              <ma14:placeholderFlag xmlns:ma14="http://schemas.microsoft.com/office/mac/drawingml/2011/main" xmlns="" val="1"/>
             </a:ext>
           </a:extLst>
         </p:spPr>
@@ -8536,7 +8559,7 @@
           <a:ln/>
           <a:extLst>
             <a:ext uri="{FAA26D3D-D897-4be2-8F04-BA451C77F1D7}">
-              <ma14:placeholderFlag xmlns="" xmlns:ma14="http://schemas.microsoft.com/office/mac/drawingml/2011/main" val="1"/>
+              <ma14:placeholderFlag xmlns:ma14="http://schemas.microsoft.com/office/mac/drawingml/2011/main" xmlns="" val="1"/>
             </a:ext>
           </a:extLst>
         </p:spPr>
@@ -8650,14 +8673,14 @@
         <p:spPr>
           <a:extLst>
             <a:ext uri="{909E8E84-426E-40dd-AFC4-6F175D3DCCD1}">
-              <a14:hiddenFill xmlns="" xmlns:a14="http://schemas.microsoft.com/office/drawing/2010/main">
+              <a14:hiddenFill xmlns:a14="http://schemas.microsoft.com/office/drawing/2010/main" xmlns="">
                 <a:solidFill>
                   <a:schemeClr val="accent1"/>
                 </a:solidFill>
               </a14:hiddenFill>
             </a:ext>
             <a:ext uri="{91240B29-F687-4f45-9708-019B960494DF}">
-              <a14:hiddenLine xmlns="" xmlns:a14="http://schemas.microsoft.com/office/drawing/2010/main" w="9525">
+              <a14:hiddenLine xmlns:a14="http://schemas.microsoft.com/office/drawing/2010/main" xmlns="" w="9525">
                 <a:solidFill>
                   <a:schemeClr val="tx1"/>
                 </a:solidFill>
@@ -8667,7 +8690,7 @@
               </a14:hiddenLine>
             </a:ext>
             <a:ext uri="{AF507438-7753-43e0-B8FC-AC1667EBCBE1}">
-              <a14:hiddenEffects xmlns="" xmlns:a14="http://schemas.microsoft.com/office/drawing/2010/main">
+              <a14:hiddenEffects xmlns:a14="http://schemas.microsoft.com/office/drawing/2010/main" xmlns="">
                 <a:effectLst>
                   <a:outerShdw blurRad="63500" dist="38099" dir="2700000" algn="ctr" rotWithShape="0">
                     <a:schemeClr val="bg2">
@@ -8678,7 +8701,7 @@
               </a14:hiddenEffects>
             </a:ext>
             <a:ext uri="{FAA26D3D-D897-4be2-8F04-BA451C77F1D7}">
-              <ma14:placeholderFlag xmlns="" xmlns:ma14="http://schemas.microsoft.com/office/mac/drawingml/2011/main" val="1"/>
+              <ma14:placeholderFlag xmlns:ma14="http://schemas.microsoft.com/office/mac/drawingml/2011/main" xmlns="" val="1"/>
             </a:ext>
           </a:extLst>
         </p:spPr>
@@ -8822,7 +8845,7 @@
           <a:ln/>
           <a:extLst>
             <a:ext uri="{FAA26D3D-D897-4be2-8F04-BA451C77F1D7}">
-              <ma14:placeholderFlag xmlns="" xmlns:ma14="http://schemas.microsoft.com/office/mac/drawingml/2011/main" val="1"/>
+              <ma14:placeholderFlag xmlns:ma14="http://schemas.microsoft.com/office/mac/drawingml/2011/main" xmlns="" val="1"/>
             </a:ext>
           </a:extLst>
         </p:spPr>
@@ -8910,14 +8933,14 @@
         <p:spPr>
           <a:extLst>
             <a:ext uri="{909E8E84-426E-40dd-AFC4-6F175D3DCCD1}">
-              <a14:hiddenFill xmlns="" xmlns:a14="http://schemas.microsoft.com/office/drawing/2010/main">
+              <a14:hiddenFill xmlns:a14="http://schemas.microsoft.com/office/drawing/2010/main" xmlns="">
                 <a:solidFill>
                   <a:schemeClr val="accent1"/>
                 </a:solidFill>
               </a14:hiddenFill>
             </a:ext>
             <a:ext uri="{91240B29-F687-4f45-9708-019B960494DF}">
-              <a14:hiddenLine xmlns="" xmlns:a14="http://schemas.microsoft.com/office/drawing/2010/main" w="9525">
+              <a14:hiddenLine xmlns:a14="http://schemas.microsoft.com/office/drawing/2010/main" xmlns="" w="9525">
                 <a:solidFill>
                   <a:schemeClr val="tx1"/>
                 </a:solidFill>
@@ -8927,7 +8950,7 @@
               </a14:hiddenLine>
             </a:ext>
             <a:ext uri="{AF507438-7753-43e0-B8FC-AC1667EBCBE1}">
-              <a14:hiddenEffects xmlns="" xmlns:a14="http://schemas.microsoft.com/office/drawing/2010/main">
+              <a14:hiddenEffects xmlns:a14="http://schemas.microsoft.com/office/drawing/2010/main" xmlns="">
                 <a:effectLst>
                   <a:outerShdw blurRad="63500" dist="38099" dir="2700000" algn="ctr" rotWithShape="0">
                     <a:schemeClr val="bg2">
@@ -8938,7 +8961,7 @@
               </a14:hiddenEffects>
             </a:ext>
             <a:ext uri="{FAA26D3D-D897-4be2-8F04-BA451C77F1D7}">
-              <ma14:placeholderFlag xmlns="" xmlns:ma14="http://schemas.microsoft.com/office/mac/drawingml/2011/main" val="1"/>
+              <ma14:placeholderFlag xmlns:ma14="http://schemas.microsoft.com/office/mac/drawingml/2011/main" xmlns="" val="1"/>
             </a:ext>
           </a:extLst>
         </p:spPr>
@@ -9082,7 +9105,7 @@
           <a:ln/>
           <a:extLst>
             <a:ext uri="{FAA26D3D-D897-4be2-8F04-BA451C77F1D7}">
-              <ma14:placeholderFlag xmlns="" xmlns:ma14="http://schemas.microsoft.com/office/mac/drawingml/2011/main" val="1"/>
+              <ma14:placeholderFlag xmlns:ma14="http://schemas.microsoft.com/office/mac/drawingml/2011/main" xmlns="" val="1"/>
             </a:ext>
           </a:extLst>
         </p:spPr>
@@ -15167,7 +15190,13 @@
   <p:cSld>
     <p:spTree>
       <p:nvGrpSpPr>
-        <p:cNvPr id="1" name=""/>
+        <p:cNvPr id="1" name="">
+          <a:extLst>
+            <a:ext uri="{FF2B5EF4-FFF2-40B4-BE49-F238E27FC236}">
+              <a16:creationId xmlns:a16="http://schemas.microsoft.com/office/drawing/2014/main" id="{ADD84D26-C910-6453-44FA-B4C30DB57EAB}"/>
+            </a:ext>
+          </a:extLst>
+        </p:cNvPr>
         <p:cNvGrpSpPr/>
         <p:nvPr/>
       </p:nvGrpSpPr>
@@ -15181,15 +15210,15 @@
       </p:grpSpPr>
       <p:sp>
         <p:nvSpPr>
-          <p:cNvPr id="2" name="Content Placeholder 1">
+          <p:cNvPr id="842755" name="Rectangle 3">
             <a:extLst>
               <a:ext uri="{FF2B5EF4-FFF2-40B4-BE49-F238E27FC236}">
-                <a16:creationId xmlns:a16="http://schemas.microsoft.com/office/drawing/2014/main" id="{C2265A0C-3D75-F9B3-E395-DBE7566F6D74}"/>
+                <a16:creationId xmlns:a16="http://schemas.microsoft.com/office/drawing/2014/main" id="{B580C514-AA1D-10CB-4B8B-16C37E3E713F}"/>
               </a:ext>
             </a:extLst>
           </p:cNvPr>
           <p:cNvSpPr>
-            <a:spLocks noGrp="1"/>
+            <a:spLocks noGrp="1" noChangeArrowheads="1"/>
           </p:cNvSpPr>
           <p:nvPr>
             <p:ph idx="1"/>
@@ -15200,16 +15229,235 @@
           <a:bodyPr/>
           <a:lstStyle/>
           <a:p>
-            <a:endParaRPr lang="en-US"/>
+            <a:pPr eaLnBrk="1" hangingPunct="1">
+              <a:lnSpc>
+                <a:spcPct val="90000"/>
+              </a:lnSpc>
+            </a:pPr>
+            <a:r>
+              <a:rPr lang="en-US" altLang="en-US" dirty="0">
+                <a:solidFill>
+                  <a:srgbClr val="000000"/>
+                </a:solidFill>
+              </a:rPr>
+              <a:t>1 billion transistor chip</a:t>
+            </a:r>
+          </a:p>
+          <a:p>
+            <a:pPr lvl="1" eaLnBrk="1" hangingPunct="1">
+              <a:lnSpc>
+                <a:spcPct val="90000"/>
+              </a:lnSpc>
+            </a:pPr>
+            <a:r>
+              <a:rPr lang="en-US" altLang="en-US" dirty="0">
+                <a:solidFill>
+                  <a:srgbClr val="000000"/>
+                </a:solidFill>
+              </a:rPr>
+              <a:t>50 M logic transistors</a:t>
+            </a:r>
+          </a:p>
+          <a:p>
+            <a:pPr lvl="2">
+              <a:lnSpc>
+                <a:spcPct val="90000"/>
+              </a:lnSpc>
+            </a:pPr>
+            <a:r>
+              <a:rPr lang="en-US" altLang="en-US" dirty="0">
+                <a:solidFill>
+                  <a:srgbClr val="000000"/>
+                </a:solidFill>
+              </a:rPr>
+              <a:t>Average width: 12 </a:t>
+            </a:r>
+            <a:r>
+              <a:rPr lang="el-GR" dirty="0">
+                <a:solidFill>
+                  <a:srgbClr val="000000"/>
+                </a:solidFill>
+              </a:rPr>
+              <a:t>λ</a:t>
+            </a:r>
+            <a:endParaRPr lang="en-US" altLang="en-US" dirty="0">
+              <a:solidFill>
+                <a:srgbClr val="000000"/>
+              </a:solidFill>
+              <a:latin typeface="Symbol" pitchFamily="2" charset="2"/>
+            </a:endParaRPr>
+          </a:p>
+          <a:p>
+            <a:pPr lvl="2" eaLnBrk="1" hangingPunct="1">
+              <a:lnSpc>
+                <a:spcPct val="90000"/>
+              </a:lnSpc>
+            </a:pPr>
+            <a:r>
+              <a:rPr lang="en-US" altLang="en-US" dirty="0">
+                <a:solidFill>
+                  <a:srgbClr val="000000"/>
+                </a:solidFill>
+              </a:rPr>
+              <a:t>Activity factor = 0.1</a:t>
+            </a:r>
+            <a:endParaRPr lang="en-US" altLang="en-US" dirty="0">
+              <a:solidFill>
+                <a:srgbClr val="000000"/>
+              </a:solidFill>
+              <a:latin typeface="Symbol" pitchFamily="2" charset="2"/>
+            </a:endParaRPr>
+          </a:p>
+          <a:p>
+            <a:pPr lvl="1" eaLnBrk="1" hangingPunct="1">
+              <a:lnSpc>
+                <a:spcPct val="90000"/>
+              </a:lnSpc>
+            </a:pPr>
+            <a:r>
+              <a:rPr lang="en-US" altLang="en-US" dirty="0">
+                <a:solidFill>
+                  <a:srgbClr val="000000"/>
+                </a:solidFill>
+              </a:rPr>
+              <a:t>950 M memory transistors</a:t>
+            </a:r>
+          </a:p>
+          <a:p>
+            <a:pPr lvl="2">
+              <a:lnSpc>
+                <a:spcPct val="90000"/>
+              </a:lnSpc>
+            </a:pPr>
+            <a:r>
+              <a:rPr lang="en-US" altLang="en-US" dirty="0">
+                <a:solidFill>
+                  <a:srgbClr val="000000"/>
+                </a:solidFill>
+              </a:rPr>
+              <a:t>Average width: 4 </a:t>
+            </a:r>
+            <a:r>
+              <a:rPr lang="el-GR" altLang="en-US" dirty="0">
+                <a:solidFill>
+                  <a:srgbClr val="000000"/>
+                </a:solidFill>
+              </a:rPr>
+              <a:t>λ</a:t>
+            </a:r>
+            <a:endParaRPr lang="en-US" altLang="en-US" dirty="0">
+              <a:solidFill>
+                <a:srgbClr val="000000"/>
+              </a:solidFill>
+              <a:latin typeface="Symbol" pitchFamily="2" charset="2"/>
+            </a:endParaRPr>
+          </a:p>
+          <a:p>
+            <a:pPr lvl="2" eaLnBrk="1" hangingPunct="1">
+              <a:lnSpc>
+                <a:spcPct val="90000"/>
+              </a:lnSpc>
+            </a:pPr>
+            <a:r>
+              <a:rPr lang="en-US" altLang="en-US" dirty="0">
+                <a:solidFill>
+                  <a:srgbClr val="000000"/>
+                </a:solidFill>
+              </a:rPr>
+              <a:t>Activity factor = 0.02</a:t>
+            </a:r>
+            <a:endParaRPr lang="en-US" altLang="en-US" dirty="0">
+              <a:solidFill>
+                <a:srgbClr val="000000"/>
+              </a:solidFill>
+              <a:latin typeface="Symbol" pitchFamily="2" charset="2"/>
+            </a:endParaRPr>
+          </a:p>
+          <a:p>
+            <a:pPr lvl="1" eaLnBrk="1" hangingPunct="1">
+              <a:lnSpc>
+                <a:spcPct val="90000"/>
+              </a:lnSpc>
+            </a:pPr>
+            <a:r>
+              <a:rPr lang="en-US" altLang="en-US" dirty="0">
+                <a:solidFill>
+                  <a:srgbClr val="000000"/>
+                </a:solidFill>
+              </a:rPr>
+              <a:t>1.0 V 65 nm process</a:t>
+            </a:r>
+          </a:p>
+          <a:p>
+            <a:pPr lvl="1">
+              <a:lnSpc>
+                <a:spcPct val="90000"/>
+              </a:lnSpc>
+            </a:pPr>
+            <a:r>
+              <a:rPr lang="en-US" altLang="en-US" dirty="0">
+                <a:solidFill>
+                  <a:srgbClr val="000000"/>
+                </a:solidFill>
+              </a:rPr>
+              <a:t>C = 1 fF/</a:t>
+            </a:r>
+            <a:r>
+              <a:rPr lang="el-GR" altLang="en-US" dirty="0">
+                <a:solidFill>
+                  <a:srgbClr val="000000"/>
+                </a:solidFill>
+              </a:rPr>
+              <a:t>μ</a:t>
+            </a:r>
+            <a:r>
+              <a:rPr lang="en-US" altLang="en-US" dirty="0">
+                <a:solidFill>
+                  <a:srgbClr val="000000"/>
+                </a:solidFill>
+              </a:rPr>
+              <a:t>m (gate) + 0.8 fF/</a:t>
+            </a:r>
+            <a:r>
+              <a:rPr lang="el-GR" altLang="en-US" dirty="0">
+                <a:solidFill>
+                  <a:srgbClr val="000000"/>
+                </a:solidFill>
+              </a:rPr>
+              <a:t>μ</a:t>
+            </a:r>
+            <a:r>
+              <a:rPr lang="en-US" altLang="en-US" dirty="0">
+                <a:solidFill>
+                  <a:srgbClr val="000000"/>
+                </a:solidFill>
+              </a:rPr>
+              <a:t>m (diffusion)</a:t>
+            </a:r>
+          </a:p>
+          <a:p>
+            <a:pPr eaLnBrk="1" hangingPunct="1">
+              <a:lnSpc>
+                <a:spcPct val="90000"/>
+              </a:lnSpc>
+            </a:pPr>
+            <a:r>
+              <a:rPr lang="en-US" altLang="en-US" dirty="0">
+                <a:solidFill>
+                  <a:srgbClr val="000000"/>
+                </a:solidFill>
+              </a:rPr>
+              <a:t>Estimate dynamic power consumption @ 1 GHz.  Neglect wire capacitance and short-circuit current.</a:t>
+            </a:r>
           </a:p>
         </p:txBody>
       </p:sp>
       <p:sp>
         <p:nvSpPr>
-          <p:cNvPr id="844802" name="Rectangle 2">
+          <p:cNvPr id="842754" name="Rectangle 2">
             <a:extLst>
               <a:ext uri="{FF2B5EF4-FFF2-40B4-BE49-F238E27FC236}">
-                <a16:creationId xmlns:a16="http://schemas.microsoft.com/office/drawing/2014/main" id="{50D72EAC-33C6-FA4A-90D2-E90FAA24D2DA}"/>
+                <a16:creationId xmlns:a16="http://schemas.microsoft.com/office/drawing/2014/main" id="{EED2651B-25FE-16D2-F0BB-A7A3FC6D1CEC}"/>
               </a:ext>
             </a:extLst>
           </p:cNvPr>
@@ -15230,39 +15478,75 @@
             </a:pPr>
             <a:r>
               <a:rPr lang="en-US" dirty="0"/>
-              <a:t>Solution</a:t>
+              <a:t>Dynamic Power Example</a:t>
             </a:r>
           </a:p>
         </p:txBody>
       </p:sp>
+      <p:pic>
+        <p:nvPicPr>
+          <p:cNvPr id="4" name="Picture 3" descr="A picture containing clock, sign&#10;&#10;Description automatically generated">
+            <a:extLst>
+              <a:ext uri="{FF2B5EF4-FFF2-40B4-BE49-F238E27FC236}">
+                <a16:creationId xmlns:a16="http://schemas.microsoft.com/office/drawing/2014/main" id="{E5AC120C-50BB-4B9D-F471-EC3BF94F47BF}"/>
+              </a:ext>
+            </a:extLst>
+          </p:cNvPr>
+          <p:cNvPicPr>
+            <a:picLocks noChangeAspect="1"/>
+          </p:cNvPicPr>
+          <p:nvPr/>
+        </p:nvPicPr>
+        <p:blipFill>
+          <a:blip r:embed="rId3"/>
+          <a:stretch>
+            <a:fillRect/>
+          </a:stretch>
+        </p:blipFill>
+        <p:spPr>
+          <a:xfrm>
+            <a:off x="6939643" y="805682"/>
+            <a:ext cx="2841171" cy="2563368"/>
+          </a:xfrm>
+          <a:prstGeom prst="rect">
+            <a:avLst/>
+          </a:prstGeom>
+        </p:spPr>
+      </p:pic>
       <p:graphicFrame>
         <p:nvGraphicFramePr>
-          <p:cNvPr id="26628" name="Object 4">
+          <p:cNvPr id="2" name="Object 4">
             <a:extLst>
               <a:ext uri="{FF2B5EF4-FFF2-40B4-BE49-F238E27FC236}">
-                <a16:creationId xmlns:a16="http://schemas.microsoft.com/office/drawing/2014/main" id="{BE2AB1BC-0C59-FD42-9E75-6B1A8C6B1E64}"/>
+                <a16:creationId xmlns:a16="http://schemas.microsoft.com/office/drawing/2014/main" id="{36A94B16-D9DB-9F83-CA26-F6F9DA3CB658}"/>
               </a:ext>
             </a:extLst>
           </p:cNvPr>
           <p:cNvGraphicFramePr>
             <a:graphicFrameLocks noChangeAspect="1"/>
           </p:cNvGraphicFramePr>
-          <p:nvPr/>
+          <p:nvPr>
+            <p:extLst>
+              <p:ext uri="{D42A27DB-BD31-4B8C-83A1-F6EECF244321}">
+                <p14:modId xmlns:p14="http://schemas.microsoft.com/office/powerpoint/2010/main" val="2812762974"/>
+              </p:ext>
+            </p:extLst>
+          </p:nvPr>
         </p:nvGraphicFramePr>
         <p:xfrm>
-          <a:off x="2214564" y="1600200"/>
+          <a:off x="2266323" y="3978884"/>
           <a:ext cx="7310437" cy="1733550"/>
         </p:xfrm>
         <a:graphic>
           <a:graphicData uri="http://schemas.openxmlformats.org/presentationml/2006/ole">
             <mc:AlternateContent xmlns:mc="http://schemas.openxmlformats.org/markup-compatibility/2006">
               <mc:Choice xmlns:v="urn:schemas-microsoft-com:vml" Requires="v">
-                <p:oleObj name="Equation" r:id="rId3" imgW="85140800" imgH="20193000" progId="Equation.DSMT4">
+                <p:oleObj name="Equation" r:id="rId4" imgW="85140800" imgH="20193000" progId="Equation.DSMT4">
                   <p:embed/>
                 </p:oleObj>
               </mc:Choice>
               <mc:Fallback>
-                <p:oleObj name="Equation" r:id="rId3" imgW="85140800" imgH="20193000" progId="Equation.DSMT4">
+                <p:oleObj name="Equation" r:id="rId4" imgW="85140800" imgH="20193000" progId="Equation.DSMT4">
                   <p:embed/>
                   <p:pic>
                     <p:nvPicPr>
@@ -15279,7 +15563,7 @@
                       <p:nvPr/>
                     </p:nvPicPr>
                     <p:blipFill>
-                      <a:blip r:embed="rId4">
+                      <a:blip r:embed="rId5">
                         <a:extLst>
                           <a:ext uri="{28A0092B-C50C-407E-A947-70E740481C1C}">
                             <a14:useLocalDpi xmlns:a14="http://schemas.microsoft.com/office/drawing/2010/main" val="0"/>
@@ -15293,7 +15577,7 @@
                     </p:blipFill>
                     <p:spPr bwMode="auto">
                       <a:xfrm>
-                        <a:off x="2214564" y="1600200"/>
+                        <a:off x="2266323" y="3978884"/>
                         <a:ext cx="7310437" cy="1733550"/>
                       </a:xfrm>
                       <a:prstGeom prst="rect">
@@ -15345,7 +15629,7 @@
     </p:spTree>
     <p:extLst>
       <p:ext uri="{BB962C8B-B14F-4D97-AF65-F5344CB8AC3E}">
-        <p14:creationId xmlns:p14="http://schemas.microsoft.com/office/powerpoint/2010/main" val="1887267756"/>
+        <p14:creationId xmlns:p14="http://schemas.microsoft.com/office/powerpoint/2010/main" val="482472966"/>
       </p:ext>
     </p:extLst>
   </p:cSld>
@@ -15538,8 +15822,8 @@
         </p:nvSpPr>
         <p:spPr>
           <a:xfrm>
-            <a:off x="0" y="1446213"/>
-            <a:ext cx="7772400" cy="4572000"/>
+            <a:off x="1017916" y="1446213"/>
+            <a:ext cx="6754483" cy="4572000"/>
           </a:xfrm>
         </p:spPr>
         <p:txBody>
@@ -15949,12 +16233,12 @@
           <a:effectLst/>
           <a:extLst>
             <a:ext uri="{909E8E84-426E-40dd-AFC4-6F175D3DCCD1}">
-              <a14:hiddenFill xmlns="" xmlns:a14="http://schemas.microsoft.com/office/drawing/2010/main">
+              <a14:hiddenFill xmlns:a14="http://schemas.microsoft.com/office/drawing/2010/main" xmlns="">
                 <a:noFill/>
               </a14:hiddenFill>
             </a:ext>
             <a:ext uri="{AF507438-7753-43e0-B8FC-AC1667EBCBE1}">
-              <a14:hiddenEffects xmlns="" xmlns:a14="http://schemas.microsoft.com/office/drawing/2010/main">
+              <a14:hiddenEffects xmlns:a14="http://schemas.microsoft.com/office/drawing/2010/main" xmlns="">
                 <a:effectLst>
                   <a:outerShdw blurRad="63500" dist="38099" dir="2700000" algn="ctr" rotWithShape="0">
                     <a:schemeClr val="bg2">
@@ -16014,12 +16298,12 @@
           <a:effectLst/>
           <a:extLst>
             <a:ext uri="{909E8E84-426E-40dd-AFC4-6F175D3DCCD1}">
-              <a14:hiddenFill xmlns="" xmlns:a14="http://schemas.microsoft.com/office/drawing/2010/main">
+              <a14:hiddenFill xmlns:a14="http://schemas.microsoft.com/office/drawing/2010/main" xmlns="">
                 <a:noFill/>
               </a14:hiddenFill>
             </a:ext>
             <a:ext uri="{AF507438-7753-43e0-B8FC-AC1667EBCBE1}">
-              <a14:hiddenEffects xmlns="" xmlns:a14="http://schemas.microsoft.com/office/drawing/2010/main">
+              <a14:hiddenEffects xmlns:a14="http://schemas.microsoft.com/office/drawing/2010/main" xmlns="">
                 <a:effectLst>
                   <a:outerShdw blurRad="63500" dist="38099" dir="2700000" algn="ctr" rotWithShape="0">
                     <a:schemeClr val="bg2">
@@ -16176,14 +16460,14 @@
           <a:effectLst/>
           <a:extLst>
             <a:ext uri="{909E8E84-426E-40dd-AFC4-6F175D3DCCD1}">
-              <a14:hiddenFill xmlns="" xmlns:a14="http://schemas.microsoft.com/office/drawing/2010/main">
+              <a14:hiddenFill xmlns:a14="http://schemas.microsoft.com/office/drawing/2010/main" xmlns="">
                 <a:solidFill>
                   <a:schemeClr val="accent1"/>
                 </a:solidFill>
               </a14:hiddenFill>
             </a:ext>
             <a:ext uri="{91240B29-F687-4f45-9708-019B960494DF}">
-              <a14:hiddenLine xmlns="" xmlns:a14="http://schemas.microsoft.com/office/drawing/2010/main" w="9525">
+              <a14:hiddenLine xmlns:a14="http://schemas.microsoft.com/office/drawing/2010/main" xmlns="" w="9525">
                 <a:solidFill>
                   <a:schemeClr val="tx1"/>
                 </a:solidFill>
@@ -16193,7 +16477,7 @@
               </a14:hiddenLine>
             </a:ext>
             <a:ext uri="{AF507438-7753-43e0-B8FC-AC1667EBCBE1}">
-              <a14:hiddenEffects xmlns="" xmlns:a14="http://schemas.microsoft.com/office/drawing/2010/main">
+              <a14:hiddenEffects xmlns:a14="http://schemas.microsoft.com/office/drawing/2010/main" xmlns="">
                 <a:effectLst>
                   <a:outerShdw blurRad="63500" dist="38099" dir="2700000" algn="ctr" rotWithShape="0">
                     <a:schemeClr val="bg2">
@@ -16341,7 +16625,7 @@
           <a:effectLst/>
           <a:extLst>
             <a:ext uri="{91240B29-F687-4f45-9708-019B960494DF}">
-              <a14:hiddenLine xmlns="" xmlns:a14="http://schemas.microsoft.com/office/drawing/2010/main" w="9525">
+              <a14:hiddenLine xmlns:a14="http://schemas.microsoft.com/office/drawing/2010/main" xmlns="" w="9525">
                 <a:solidFill>
                   <a:schemeClr val="tx1"/>
                 </a:solidFill>
@@ -16351,7 +16635,7 @@
               </a14:hiddenLine>
             </a:ext>
             <a:ext uri="{AF507438-7753-43e0-B8FC-AC1667EBCBE1}">
-              <a14:hiddenEffects xmlns="" xmlns:a14="http://schemas.microsoft.com/office/drawing/2010/main">
+              <a14:hiddenEffects xmlns:a14="http://schemas.microsoft.com/office/drawing/2010/main" xmlns="">
                 <a:effectLst>
                   <a:outerShdw blurRad="63500" dist="38099" dir="2700000" algn="ctr" rotWithShape="0">
                     <a:schemeClr val="bg2">
@@ -16408,7 +16692,7 @@
           <a:effectLst/>
           <a:extLst>
             <a:ext uri="{91240B29-F687-4f45-9708-019B960494DF}">
-              <a14:hiddenLine xmlns="" xmlns:a14="http://schemas.microsoft.com/office/drawing/2010/main" w="9525">
+              <a14:hiddenLine xmlns:a14="http://schemas.microsoft.com/office/drawing/2010/main" xmlns="" w="9525">
                 <a:solidFill>
                   <a:schemeClr val="tx1"/>
                 </a:solidFill>
@@ -16418,7 +16702,7 @@
               </a14:hiddenLine>
             </a:ext>
             <a:ext uri="{AF507438-7753-43e0-B8FC-AC1667EBCBE1}">
-              <a14:hiddenEffects xmlns="" xmlns:a14="http://schemas.microsoft.com/office/drawing/2010/main">
+              <a14:hiddenEffects xmlns:a14="http://schemas.microsoft.com/office/drawing/2010/main" xmlns="">
                 <a:effectLst>
                   <a:outerShdw blurRad="63500" dist="38099" dir="2700000" algn="ctr" rotWithShape="0">
                     <a:schemeClr val="bg2">
@@ -16475,7 +16759,7 @@
           <a:effectLst/>
           <a:extLst>
             <a:ext uri="{91240B29-F687-4f45-9708-019B960494DF}">
-              <a14:hiddenLine xmlns="" xmlns:a14="http://schemas.microsoft.com/office/drawing/2010/main" w="9525">
+              <a14:hiddenLine xmlns:a14="http://schemas.microsoft.com/office/drawing/2010/main" xmlns="" w="9525">
                 <a:solidFill>
                   <a:schemeClr val="tx1"/>
                 </a:solidFill>
@@ -16485,7 +16769,7 @@
               </a14:hiddenLine>
             </a:ext>
             <a:ext uri="{AF507438-7753-43e0-B8FC-AC1667EBCBE1}">
-              <a14:hiddenEffects xmlns="" xmlns:a14="http://schemas.microsoft.com/office/drawing/2010/main">
+              <a14:hiddenEffects xmlns:a14="http://schemas.microsoft.com/office/drawing/2010/main" xmlns="">
                 <a:effectLst>
                   <a:outerShdw blurRad="63500" dist="38099" dir="2700000" algn="ctr" rotWithShape="0">
                     <a:schemeClr val="bg2">
@@ -17094,7 +17378,12 @@
             <p:ph idx="1"/>
           </p:nvPr>
         </p:nvSpPr>
-        <p:spPr/>
+        <p:spPr>
+          <a:xfrm>
+            <a:off x="479425" y="1150314"/>
+            <a:ext cx="11243088" cy="4600990"/>
+          </a:xfrm>
+        </p:spPr>
         <p:txBody>
           <a:bodyPr/>
           <a:lstStyle/>
@@ -17630,14 +17919,14 @@
           <a:effectLst/>
           <a:extLst>
             <a:ext uri="{909E8E84-426E-40dd-AFC4-6F175D3DCCD1}">
-              <a14:hiddenFill xmlns="" xmlns:a14="http://schemas.microsoft.com/office/drawing/2010/main">
+              <a14:hiddenFill xmlns:a14="http://schemas.microsoft.com/office/drawing/2010/main" xmlns="">
                 <a:solidFill>
                   <a:schemeClr val="accent1"/>
                 </a:solidFill>
               </a14:hiddenFill>
             </a:ext>
             <a:ext uri="{91240B29-F687-4f45-9708-019B960494DF}">
-              <a14:hiddenLine xmlns="" xmlns:a14="http://schemas.microsoft.com/office/drawing/2010/main" w="9525">
+              <a14:hiddenLine xmlns:a14="http://schemas.microsoft.com/office/drawing/2010/main" xmlns="" w="9525">
                 <a:solidFill>
                   <a:schemeClr val="tx1"/>
                 </a:solidFill>
@@ -17647,7 +17936,7 @@
               </a14:hiddenLine>
             </a:ext>
             <a:ext uri="{AF507438-7753-43e0-B8FC-AC1667EBCBE1}">
-              <a14:hiddenEffects xmlns="" xmlns:a14="http://schemas.microsoft.com/office/drawing/2010/main">
+              <a14:hiddenEffects xmlns:a14="http://schemas.microsoft.com/office/drawing/2010/main" xmlns="">
                 <a:effectLst>
                   <a:outerShdw blurRad="63500" dist="38099" dir="2700000" algn="ctr" rotWithShape="0">
                     <a:schemeClr val="bg2">
@@ -17704,14 +17993,14 @@
           <a:effectLst/>
           <a:extLst>
             <a:ext uri="{909E8E84-426E-40dd-AFC4-6F175D3DCCD1}">
-              <a14:hiddenFill xmlns="" xmlns:a14="http://schemas.microsoft.com/office/drawing/2010/main">
+              <a14:hiddenFill xmlns:a14="http://schemas.microsoft.com/office/drawing/2010/main" xmlns="">
                 <a:solidFill>
                   <a:schemeClr val="accent1"/>
                 </a:solidFill>
               </a14:hiddenFill>
             </a:ext>
             <a:ext uri="{91240B29-F687-4f45-9708-019B960494DF}">
-              <a14:hiddenLine xmlns="" xmlns:a14="http://schemas.microsoft.com/office/drawing/2010/main" w="9525">
+              <a14:hiddenLine xmlns:a14="http://schemas.microsoft.com/office/drawing/2010/main" xmlns="" w="9525">
                 <a:solidFill>
                   <a:schemeClr val="tx1"/>
                 </a:solidFill>
@@ -17721,7 +18010,7 @@
               </a14:hiddenLine>
             </a:ext>
             <a:ext uri="{AF507438-7753-43e0-B8FC-AC1667EBCBE1}">
-              <a14:hiddenEffects xmlns="" xmlns:a14="http://schemas.microsoft.com/office/drawing/2010/main">
+              <a14:hiddenEffects xmlns:a14="http://schemas.microsoft.com/office/drawing/2010/main" xmlns="">
                 <a:effectLst>
                   <a:outerShdw blurRad="63500" dist="38099" dir="2700000" algn="ctr" rotWithShape="0">
                     <a:schemeClr val="bg2">
@@ -17982,7 +18271,13 @@
   <p:cSld>
     <p:spTree>
       <p:nvGrpSpPr>
-        <p:cNvPr id="1" name=""/>
+        <p:cNvPr id="1" name="">
+          <a:extLst>
+            <a:ext uri="{FF2B5EF4-FFF2-40B4-BE49-F238E27FC236}">
+              <a16:creationId xmlns:a16="http://schemas.microsoft.com/office/drawing/2014/main" id="{4F0ABE28-02E6-639A-756C-A9C2FA1E8B90}"/>
+            </a:ext>
+          </a:extLst>
+        </p:cNvPr>
         <p:cNvGrpSpPr/>
         <p:nvPr/>
       </p:nvGrpSpPr>
@@ -17994,29 +18289,207 @@
           <a:chExt cx="0" cy="0"/>
         </a:xfrm>
       </p:grpSpPr>
+      <p:sp>
+        <p:nvSpPr>
+          <p:cNvPr id="919555" name="Rectangle 3">
+            <a:extLst>
+              <a:ext uri="{FF2B5EF4-FFF2-40B4-BE49-F238E27FC236}">
+                <a16:creationId xmlns:a16="http://schemas.microsoft.com/office/drawing/2014/main" id="{D557678F-2352-15F6-AB10-D03FC2339C17}"/>
+              </a:ext>
+            </a:extLst>
+          </p:cNvPr>
+          <p:cNvSpPr>
+            <a:spLocks noGrp="1" noChangeArrowheads="1"/>
+          </p:cNvSpPr>
+          <p:nvPr>
+            <p:ph idx="1"/>
+          </p:nvPr>
+        </p:nvSpPr>
+        <p:spPr/>
+        <p:txBody>
+          <a:bodyPr/>
+          <a:lstStyle/>
+          <a:p>
+            <a:pPr eaLnBrk="1" hangingPunct="1"/>
+            <a:r>
+              <a:rPr lang="en-US" altLang="en-US" dirty="0"/>
+              <a:t>Revisit power estimation for 1 billion transistor chip</a:t>
+            </a:r>
+          </a:p>
+          <a:p>
+            <a:pPr eaLnBrk="1" hangingPunct="1"/>
+            <a:r>
+              <a:rPr lang="en-US" altLang="en-US" dirty="0"/>
+              <a:t>Estimate static power consumption</a:t>
+            </a:r>
+          </a:p>
+          <a:p>
+            <a:pPr lvl="1" eaLnBrk="1" hangingPunct="1"/>
+            <a:r>
+              <a:rPr lang="en-US" altLang="en-US" dirty="0"/>
+              <a:t>Subthreshold leakage</a:t>
+            </a:r>
+          </a:p>
+          <a:p>
+            <a:pPr lvl="2" eaLnBrk="1" hangingPunct="1"/>
+            <a:r>
+              <a:rPr lang="en-US" altLang="en-US" dirty="0"/>
+              <a:t>Normal V</a:t>
+            </a:r>
+            <a:r>
+              <a:rPr lang="en-US" altLang="en-US" baseline="-25000" dirty="0"/>
+              <a:t>t</a:t>
+            </a:r>
+            <a:r>
+              <a:rPr lang="en-US" altLang="en-US" dirty="0"/>
+              <a:t>: 		100 </a:t>
+            </a:r>
+            <a:r>
+              <a:rPr lang="en-US" altLang="en-US" dirty="0" err="1"/>
+              <a:t>nA</a:t>
+            </a:r>
+            <a:r>
+              <a:rPr lang="en-US" altLang="en-US" dirty="0"/>
+              <a:t>/</a:t>
+            </a:r>
+            <a:r>
+              <a:rPr lang="en-US" altLang="en-US" dirty="0">
+                <a:latin typeface="Symbol" panose="05050102010706020507" pitchFamily="18" charset="2"/>
+              </a:rPr>
+              <a:t>m</a:t>
+            </a:r>
+            <a:r>
+              <a:rPr lang="en-US" altLang="en-US" dirty="0"/>
+              <a:t>m</a:t>
+            </a:r>
+          </a:p>
+          <a:p>
+            <a:pPr lvl="2" eaLnBrk="1" hangingPunct="1"/>
+            <a:r>
+              <a:rPr lang="en-US" altLang="en-US" dirty="0"/>
+              <a:t>High V</a:t>
+            </a:r>
+            <a:r>
+              <a:rPr lang="en-US" altLang="en-US" baseline="-25000" dirty="0"/>
+              <a:t>t</a:t>
+            </a:r>
+            <a:r>
+              <a:rPr lang="en-US" altLang="en-US" dirty="0"/>
+              <a:t>: 		10 </a:t>
+            </a:r>
+            <a:r>
+              <a:rPr lang="en-US" altLang="en-US" dirty="0" err="1"/>
+              <a:t>nA</a:t>
+            </a:r>
+            <a:r>
+              <a:rPr lang="en-US" altLang="en-US" dirty="0"/>
+              <a:t>/</a:t>
+            </a:r>
+            <a:r>
+              <a:rPr lang="en-US" altLang="en-US" dirty="0">
+                <a:latin typeface="Symbol" panose="05050102010706020507" pitchFamily="18" charset="2"/>
+              </a:rPr>
+              <a:t>m</a:t>
+            </a:r>
+            <a:r>
+              <a:rPr lang="en-US" altLang="en-US" dirty="0"/>
+              <a:t>m</a:t>
+            </a:r>
+          </a:p>
+          <a:p>
+            <a:pPr lvl="2" eaLnBrk="1" hangingPunct="1"/>
+            <a:r>
+              <a:rPr lang="en-US" altLang="en-US" dirty="0"/>
+              <a:t>High Vt used in all memories and in 95% of logic gates</a:t>
+            </a:r>
+          </a:p>
+          <a:p>
+            <a:pPr lvl="1" eaLnBrk="1" hangingPunct="1"/>
+            <a:r>
+              <a:rPr lang="en-US" altLang="en-US" dirty="0"/>
+              <a:t>Gate leakage		5 </a:t>
+            </a:r>
+            <a:r>
+              <a:rPr lang="en-US" altLang="en-US" dirty="0" err="1"/>
+              <a:t>nA</a:t>
+            </a:r>
+            <a:r>
+              <a:rPr lang="en-US" altLang="en-US" dirty="0"/>
+              <a:t>/</a:t>
+            </a:r>
+            <a:r>
+              <a:rPr lang="en-US" altLang="en-US" dirty="0">
+                <a:latin typeface="Symbol" panose="05050102010706020507" pitchFamily="18" charset="2"/>
+              </a:rPr>
+              <a:t>m</a:t>
+            </a:r>
+            <a:r>
+              <a:rPr lang="en-US" altLang="en-US" dirty="0"/>
+              <a:t>m</a:t>
+            </a:r>
+          </a:p>
+          <a:p>
+            <a:pPr lvl="1" eaLnBrk="1" hangingPunct="1"/>
+            <a:r>
+              <a:rPr lang="en-US" altLang="en-US" dirty="0"/>
+              <a:t>Junction leakage	negligible</a:t>
+            </a:r>
+          </a:p>
+        </p:txBody>
+      </p:sp>
+      <p:sp>
+        <p:nvSpPr>
+          <p:cNvPr id="919554" name="Rectangle 2">
+            <a:extLst>
+              <a:ext uri="{FF2B5EF4-FFF2-40B4-BE49-F238E27FC236}">
+                <a16:creationId xmlns:a16="http://schemas.microsoft.com/office/drawing/2014/main" id="{F764EA3E-3F4F-5BBA-008B-4B4926490637}"/>
+              </a:ext>
+            </a:extLst>
+          </p:cNvPr>
+          <p:cNvSpPr>
+            <a:spLocks noGrp="1" noChangeArrowheads="1"/>
+          </p:cNvSpPr>
+          <p:nvPr>
+            <p:ph type="title"/>
+          </p:nvPr>
+        </p:nvSpPr>
+        <p:spPr/>
+        <p:txBody>
+          <a:bodyPr/>
+          <a:lstStyle/>
+          <a:p>
+            <a:pPr eaLnBrk="1" hangingPunct="1">
+              <a:defRPr/>
+            </a:pPr>
+            <a:r>
+              <a:rPr lang="en-US" dirty="0"/>
+              <a:t>Static Power Example</a:t>
+            </a:r>
+          </a:p>
+        </p:txBody>
+      </p:sp>
       <p:graphicFrame>
         <p:nvGraphicFramePr>
-          <p:cNvPr id="47108" name="Object 4">
+          <p:cNvPr id="2" name="Object 4">
             <a:extLst>
               <a:ext uri="{FF2B5EF4-FFF2-40B4-BE49-F238E27FC236}">
-                <a16:creationId xmlns:a16="http://schemas.microsoft.com/office/drawing/2014/main" id="{A0974A76-5A94-CD49-A31C-A6876675D068}"/>
+                <a16:creationId xmlns:a16="http://schemas.microsoft.com/office/drawing/2014/main" id="{A66A6423-F7E6-EA48-CE2A-593565856826}"/>
               </a:ext>
             </a:extLst>
           </p:cNvPr>
           <p:cNvGraphicFramePr>
-            <a:graphicFrameLocks noGrp="1" noChangeAspect="1"/>
+            <a:graphicFrameLocks noChangeAspect="1"/>
           </p:cNvGraphicFramePr>
           <p:nvPr>
-            <p:ph idx="1"/>
             <p:extLst>
               <p:ext uri="{D42A27DB-BD31-4B8C-83A1-F6EECF244321}">
-                <p14:modId xmlns:p14="http://schemas.microsoft.com/office/powerpoint/2010/main" val="3493306492"/>
+                <p14:modId xmlns:p14="http://schemas.microsoft.com/office/powerpoint/2010/main" val="1775919319"/>
               </p:ext>
             </p:extLst>
           </p:nvPr>
         </p:nvGraphicFramePr>
         <p:xfrm>
-          <a:off x="2209800" y="1779588"/>
+          <a:off x="3193211" y="3475039"/>
           <a:ext cx="7848600" cy="2259012"/>
         </p:xfrm>
         <a:graphic>
@@ -18059,7 +18532,7 @@
                     </p:blipFill>
                     <p:spPr bwMode="auto">
                       <a:xfrm>
-                        <a:off x="2209800" y="1779588"/>
+                        <a:off x="3193211" y="3475039"/>
                         <a:ext cx="7848600" cy="2259012"/>
                       </a:xfrm>
                       <a:prstGeom prst="rect">
@@ -18108,41 +18581,10 @@
           </a:graphicData>
         </a:graphic>
       </p:graphicFrame>
-      <p:sp>
-        <p:nvSpPr>
-          <p:cNvPr id="921602" name="Rectangle 2">
-            <a:extLst>
-              <a:ext uri="{FF2B5EF4-FFF2-40B4-BE49-F238E27FC236}">
-                <a16:creationId xmlns:a16="http://schemas.microsoft.com/office/drawing/2014/main" id="{4212A29B-4194-B542-B69A-F2135E95FB50}"/>
-              </a:ext>
-            </a:extLst>
-          </p:cNvPr>
-          <p:cNvSpPr>
-            <a:spLocks noGrp="1" noChangeArrowheads="1"/>
-          </p:cNvSpPr>
-          <p:nvPr>
-            <p:ph type="title"/>
-          </p:nvPr>
-        </p:nvSpPr>
-        <p:spPr/>
-        <p:txBody>
-          <a:bodyPr/>
-          <a:lstStyle/>
-          <a:p>
-            <a:pPr eaLnBrk="1" hangingPunct="1">
-              <a:defRPr/>
-            </a:pPr>
-            <a:r>
-              <a:rPr lang="en-US" sz="4000" dirty="0"/>
-              <a:t>Solution</a:t>
-            </a:r>
-          </a:p>
-        </p:txBody>
-      </p:sp>
     </p:spTree>
     <p:extLst>
       <p:ext uri="{BB962C8B-B14F-4D97-AF65-F5344CB8AC3E}">
-        <p14:creationId xmlns:p14="http://schemas.microsoft.com/office/powerpoint/2010/main" val="222733056"/>
+        <p14:creationId xmlns:p14="http://schemas.microsoft.com/office/powerpoint/2010/main" val="3233034307"/>
       </p:ext>
     </p:extLst>
   </p:cSld>
@@ -18335,7 +18777,7 @@
         </p:nvSpPr>
         <p:spPr>
           <a:xfrm>
-            <a:off x="0" y="1524000"/>
+            <a:off x="1735137" y="1600201"/>
             <a:ext cx="7543800" cy="4572000"/>
           </a:xfrm>
         </p:spPr>
@@ -18459,14 +18901,14 @@
           <a:effectLst/>
           <a:extLst>
             <a:ext uri="{909E8E84-426E-40dd-AFC4-6F175D3DCCD1}">
-              <a14:hiddenFill xmlns="" xmlns:a14="http://schemas.microsoft.com/office/drawing/2010/main">
+              <a14:hiddenFill xmlns:a14="http://schemas.microsoft.com/office/drawing/2010/main" xmlns="">
                 <a:solidFill>
                   <a:schemeClr val="accent1"/>
                 </a:solidFill>
               </a14:hiddenFill>
             </a:ext>
             <a:ext uri="{91240B29-F687-4f45-9708-019B960494DF}">
-              <a14:hiddenLine xmlns="" xmlns:a14="http://schemas.microsoft.com/office/drawing/2010/main" w="9525">
+              <a14:hiddenLine xmlns:a14="http://schemas.microsoft.com/office/drawing/2010/main" xmlns="" w="9525">
                 <a:solidFill>
                   <a:schemeClr val="tx1"/>
                 </a:solidFill>
@@ -18476,7 +18918,7 @@
               </a14:hiddenLine>
             </a:ext>
             <a:ext uri="{AF507438-7753-43e0-B8FC-AC1667EBCBE1}">
-              <a14:hiddenEffects xmlns="" xmlns:a14="http://schemas.microsoft.com/office/drawing/2010/main">
+              <a14:hiddenEffects xmlns:a14="http://schemas.microsoft.com/office/drawing/2010/main" xmlns="">
                 <a:effectLst>
                   <a:outerShdw blurRad="63500" dist="38099" dir="2700000" algn="ctr" rotWithShape="0">
                     <a:schemeClr val="bg2">
@@ -18887,14 +19329,14 @@
             <p:ph idx="1"/>
             <p:extLst>
               <p:ext uri="{D42A27DB-BD31-4B8C-83A1-F6EECF244321}">
-                <p14:modId xmlns:p14="http://schemas.microsoft.com/office/powerpoint/2010/main" val="3348829454"/>
+                <p14:modId xmlns:p14="http://schemas.microsoft.com/office/powerpoint/2010/main" val="1647765008"/>
               </p:ext>
             </p:extLst>
           </p:nvPr>
         </p:nvGraphicFramePr>
         <p:xfrm>
-          <a:off x="3265488" y="2709863"/>
-          <a:ext cx="2768600" cy="584200"/>
+          <a:off x="2079933" y="2131134"/>
+          <a:ext cx="4641917" cy="979487"/>
         </p:xfrm>
         <a:graphic>
           <a:graphicData uri="http://schemas.openxmlformats.org/presentationml/2006/ole">
@@ -18936,8 +19378,8 @@
                     </p:blipFill>
                     <p:spPr bwMode="auto">
                       <a:xfrm>
-                        <a:off x="3265488" y="2709863"/>
-                        <a:ext cx="2768600" cy="584200"/>
+                        <a:off x="2079933" y="2131134"/>
+                        <a:ext cx="4641917" cy="979487"/>
                       </a:xfrm>
                       <a:prstGeom prst="rect">
                         <a:avLst/>
@@ -18947,36 +19389,6 @@
                         <a:noFill/>
                       </a:ln>
                       <a:effectLst/>
-                      <a:extLst>
-                        <a:ext uri="{909E8E84-426E-40DD-AFC4-6F175D3DCCD1}">
-                          <a14:hiddenFill xmlns:a14="http://schemas.microsoft.com/office/drawing/2010/main">
-                            <a:solidFill>
-                              <a:schemeClr val="accent1"/>
-                            </a:solidFill>
-                          </a14:hiddenFill>
-                        </a:ext>
-                        <a:ext uri="{91240B29-F687-4F45-9708-019B960494DF}">
-                          <a14:hiddenLine xmlns:a14="http://schemas.microsoft.com/office/drawing/2010/main" w="9525">
-                            <a:solidFill>
-                              <a:schemeClr val="tx1"/>
-                            </a:solidFill>
-                            <a:miter lim="800000"/>
-                            <a:headEnd/>
-                            <a:tailEnd/>
-                          </a14:hiddenLine>
-                        </a:ext>
-                        <a:ext uri="{AF507438-7753-43E0-B8FC-AC1667EBCBE1}">
-                          <a14:hiddenEffects xmlns:a14="http://schemas.microsoft.com/office/drawing/2010/main">
-                            <a:effectLst>
-                              <a:outerShdw dist="35921" dir="2700000" algn="ctr" rotWithShape="0">
-                                <a:schemeClr val="bg2">
-                                  <a:alpha val="74997"/>
-                                </a:schemeClr>
-                              </a:outerShdw>
-                            </a:effectLst>
-                          </a14:hiddenEffects>
-                        </a:ext>
-                      </a:extLst>
                     </p:spPr>
                   </p:pic>
                 </p:oleObj>
@@ -19034,8 +19446,8 @@
         </p:nvSpPr>
         <p:spPr>
           <a:xfrm>
-            <a:off x="0" y="1524000"/>
-            <a:ext cx="7696200" cy="4572000"/>
+            <a:off x="1300480" y="1524000"/>
+            <a:ext cx="6395720" cy="4572000"/>
           </a:xfrm>
         </p:spPr>
         <p:txBody>
@@ -19227,13 +19639,13 @@
             <p:ph sz="quarter" idx="4294967295"/>
             <p:extLst>
               <p:ext uri="{D42A27DB-BD31-4B8C-83A1-F6EECF244321}">
-                <p14:modId xmlns:p14="http://schemas.microsoft.com/office/powerpoint/2010/main" val="603096654"/>
+                <p14:modId xmlns:p14="http://schemas.microsoft.com/office/powerpoint/2010/main" val="2561989918"/>
               </p:ext>
             </p:extLst>
           </p:nvPr>
         </p:nvGraphicFramePr>
         <p:xfrm>
-          <a:off x="0" y="3498850"/>
+          <a:off x="2079933" y="3294063"/>
           <a:ext cx="1524000" cy="692150"/>
         </p:xfrm>
         <a:graphic>
@@ -19276,7 +19688,7 @@
                     </p:blipFill>
                     <p:spPr bwMode="auto">
                       <a:xfrm>
-                        <a:off x="0" y="3498850"/>
+                        <a:off x="2079933" y="3294063"/>
                         <a:ext cx="1524000" cy="692150"/>
                       </a:xfrm>
                       <a:prstGeom prst="rect">
@@ -20066,14 +20478,14 @@
           <a:effectLst/>
           <a:extLst>
             <a:ext uri="{909E8E84-426E-40dd-AFC4-6F175D3DCCD1}">
-              <a14:hiddenFill xmlns="" xmlns:a14="http://schemas.microsoft.com/office/drawing/2010/main">
+              <a14:hiddenFill xmlns:a14="http://schemas.microsoft.com/office/drawing/2010/main" xmlns="">
                 <a:solidFill>
                   <a:schemeClr val="accent1"/>
                 </a:solidFill>
               </a14:hiddenFill>
             </a:ext>
             <a:ext uri="{91240B29-F687-4f45-9708-019B960494DF}">
-              <a14:hiddenLine xmlns="" xmlns:a14="http://schemas.microsoft.com/office/drawing/2010/main" w="9525">
+              <a14:hiddenLine xmlns:a14="http://schemas.microsoft.com/office/drawing/2010/main" xmlns="" w="9525">
                 <a:solidFill>
                   <a:schemeClr val="tx1"/>
                 </a:solidFill>
@@ -20083,7 +20495,7 @@
               </a14:hiddenLine>
             </a:ext>
             <a:ext uri="{AF507438-7753-43e0-B8FC-AC1667EBCBE1}">
-              <a14:hiddenEffects xmlns="" xmlns:a14="http://schemas.microsoft.com/office/drawing/2010/main">
+              <a14:hiddenEffects xmlns:a14="http://schemas.microsoft.com/office/drawing/2010/main" xmlns="">
                 <a:effectLst>
                   <a:outerShdw blurRad="63500" dist="38099" dir="2700000" algn="ctr" rotWithShape="0">
                     <a:schemeClr val="bg2">
@@ -20125,14 +20537,14 @@
           <a:effectLst/>
           <a:extLst>
             <a:ext uri="{909E8E84-426E-40dd-AFC4-6F175D3DCCD1}">
-              <a14:hiddenFill xmlns="" xmlns:a14="http://schemas.microsoft.com/office/drawing/2010/main">
+              <a14:hiddenFill xmlns:a14="http://schemas.microsoft.com/office/drawing/2010/main" xmlns="">
                 <a:solidFill>
                   <a:schemeClr val="accent1"/>
                 </a:solidFill>
               </a14:hiddenFill>
             </a:ext>
             <a:ext uri="{91240B29-F687-4f45-9708-019B960494DF}">
-              <a14:hiddenLine xmlns="" xmlns:a14="http://schemas.microsoft.com/office/drawing/2010/main" w="9525">
+              <a14:hiddenLine xmlns:a14="http://schemas.microsoft.com/office/drawing/2010/main" xmlns="" w="9525">
                 <a:solidFill>
                   <a:schemeClr val="tx1"/>
                 </a:solidFill>
@@ -20142,7 +20554,7 @@
               </a14:hiddenLine>
             </a:ext>
             <a:ext uri="{AF507438-7753-43e0-B8FC-AC1667EBCBE1}">
-              <a14:hiddenEffects xmlns="" xmlns:a14="http://schemas.microsoft.com/office/drawing/2010/main">
+              <a14:hiddenEffects xmlns:a14="http://schemas.microsoft.com/office/drawing/2010/main" xmlns="">
                 <a:effectLst>
                   <a:outerShdw blurRad="63500" dist="38099" dir="2700000" algn="ctr" rotWithShape="0">
                     <a:schemeClr val="bg2">
@@ -20446,7 +20858,12 @@
             <p:ph idx="1"/>
           </p:nvPr>
         </p:nvSpPr>
-        <p:spPr/>
+        <p:spPr>
+          <a:xfrm>
+            <a:off x="479425" y="1133061"/>
+            <a:ext cx="6922039" cy="4600990"/>
+          </a:xfrm>
+        </p:spPr>
         <p:txBody>
           <a:bodyPr/>
           <a:lstStyle/>
@@ -20969,14 +21386,14 @@
           <a:effectLst/>
           <a:extLst>
             <a:ext uri="{909E8E84-426E-40dd-AFC4-6F175D3DCCD1}">
-              <a14:hiddenFill xmlns="" xmlns:a14="http://schemas.microsoft.com/office/drawing/2010/main">
+              <a14:hiddenFill xmlns:a14="http://schemas.microsoft.com/office/drawing/2010/main" xmlns="">
                 <a:solidFill>
                   <a:schemeClr val="accent1"/>
                 </a:solidFill>
               </a14:hiddenFill>
             </a:ext>
             <a:ext uri="{91240B29-F687-4f45-9708-019B960494DF}">
-              <a14:hiddenLine xmlns="" xmlns:a14="http://schemas.microsoft.com/office/drawing/2010/main" w="9525">
+              <a14:hiddenLine xmlns:a14="http://schemas.microsoft.com/office/drawing/2010/main" xmlns="" w="9525">
                 <a:solidFill>
                   <a:schemeClr val="tx1"/>
                 </a:solidFill>
@@ -20986,7 +21403,7 @@
               </a14:hiddenLine>
             </a:ext>
             <a:ext uri="{AF507438-7753-43e0-B8FC-AC1667EBCBE1}">
-              <a14:hiddenEffects xmlns="" xmlns:a14="http://schemas.microsoft.com/office/drawing/2010/main">
+              <a14:hiddenEffects xmlns:a14="http://schemas.microsoft.com/office/drawing/2010/main" xmlns="">
                 <a:effectLst>
                   <a:outerShdw blurRad="63500" dist="38099" dir="2700000" algn="ctr" rotWithShape="0">
                     <a:schemeClr val="bg2">
@@ -21144,14 +21561,14 @@
           <a:effectLst/>
           <a:extLst>
             <a:ext uri="{909E8E84-426E-40dd-AFC4-6F175D3DCCD1}">
-              <a14:hiddenFill xmlns="" xmlns:a14="http://schemas.microsoft.com/office/drawing/2010/main">
+              <a14:hiddenFill xmlns:a14="http://schemas.microsoft.com/office/drawing/2010/main" xmlns="">
                 <a:solidFill>
                   <a:schemeClr val="accent1"/>
                 </a:solidFill>
               </a14:hiddenFill>
             </a:ext>
             <a:ext uri="{91240B29-F687-4f45-9708-019B960494DF}">
-              <a14:hiddenLine xmlns="" xmlns:a14="http://schemas.microsoft.com/office/drawing/2010/main" w="9525">
+              <a14:hiddenLine xmlns:a14="http://schemas.microsoft.com/office/drawing/2010/main" xmlns="" w="9525">
                 <a:solidFill>
                   <a:schemeClr val="tx1"/>
                 </a:solidFill>
@@ -21161,7 +21578,7 @@
               </a14:hiddenLine>
             </a:ext>
             <a:ext uri="{AF507438-7753-43e0-B8FC-AC1667EBCBE1}">
-              <a14:hiddenEffects xmlns="" xmlns:a14="http://schemas.microsoft.com/office/drawing/2010/main">
+              <a14:hiddenEffects xmlns:a14="http://schemas.microsoft.com/office/drawing/2010/main" xmlns="">
                 <a:effectLst>
                   <a:outerShdw blurRad="63500" dist="38099" dir="2700000" algn="ctr" rotWithShape="0">
                     <a:schemeClr val="bg2">
@@ -21326,7 +21743,7 @@
           <a:effectLst/>
           <a:extLst>
             <a:ext uri="{AF507438-7753-43e0-B8FC-AC1667EBCBE1}">
-              <a14:hiddenEffects xmlns="" xmlns:a14="http://schemas.microsoft.com/office/drawing/2010/main">
+              <a14:hiddenEffects xmlns:a14="http://schemas.microsoft.com/office/drawing/2010/main" xmlns="">
                 <a:effectLst>
                   <a:outerShdw blurRad="63500" dist="38099" dir="2700000" algn="ctr" rotWithShape="0">
                     <a:schemeClr val="bg2">
@@ -21388,7 +21805,7 @@
           <a:effectLst/>
           <a:extLst>
             <a:ext uri="{AF507438-7753-43e0-B8FC-AC1667EBCBE1}">
-              <a14:hiddenEffects xmlns="" xmlns:a14="http://schemas.microsoft.com/office/drawing/2010/main">
+              <a14:hiddenEffects xmlns:a14="http://schemas.microsoft.com/office/drawing/2010/main" xmlns="">
                 <a:effectLst>
                   <a:outerShdw blurRad="63500" dist="38099" dir="2700000" algn="ctr" rotWithShape="0">
                     <a:schemeClr val="bg2">
@@ -21450,7 +21867,7 @@
           <a:effectLst/>
           <a:extLst>
             <a:ext uri="{AF507438-7753-43e0-B8FC-AC1667EBCBE1}">
-              <a14:hiddenEffects xmlns="" xmlns:a14="http://schemas.microsoft.com/office/drawing/2010/main">
+              <a14:hiddenEffects xmlns:a14="http://schemas.microsoft.com/office/drawing/2010/main" xmlns="">
                 <a:effectLst>
                   <a:outerShdw blurRad="63500" dist="38099" dir="2700000" algn="ctr" rotWithShape="0">
                     <a:schemeClr val="bg2">
@@ -21864,13 +22281,13 @@
             <p:ph sz="quarter" idx="4294967295"/>
             <p:extLst>
               <p:ext uri="{D42A27DB-BD31-4B8C-83A1-F6EECF244321}">
-                <p14:modId xmlns:p14="http://schemas.microsoft.com/office/powerpoint/2010/main" val="3758327536"/>
+                <p14:modId xmlns:p14="http://schemas.microsoft.com/office/powerpoint/2010/main" val="3683765126"/>
               </p:ext>
             </p:extLst>
           </p:nvPr>
         </p:nvGraphicFramePr>
         <p:xfrm>
-          <a:off x="0" y="2627313"/>
+          <a:off x="914400" y="2643188"/>
           <a:ext cx="3048000" cy="877887"/>
         </p:xfrm>
         <a:graphic>
@@ -21913,7 +22330,7 @@
                     </p:blipFill>
                     <p:spPr bwMode="auto">
                       <a:xfrm>
-                        <a:off x="0" y="2627313"/>
+                        <a:off x="914400" y="2643188"/>
                         <a:ext cx="3048000" cy="877887"/>
                       </a:xfrm>
                       <a:prstGeom prst="rect">
@@ -21978,13 +22395,13 @@
             <p:ph sz="quarter" idx="4294967295"/>
             <p:extLst>
               <p:ext uri="{D42A27DB-BD31-4B8C-83A1-F6EECF244321}">
-                <p14:modId xmlns:p14="http://schemas.microsoft.com/office/powerpoint/2010/main" val="158719534"/>
+                <p14:modId xmlns:p14="http://schemas.microsoft.com/office/powerpoint/2010/main" val="3076974510"/>
               </p:ext>
             </p:extLst>
           </p:nvPr>
         </p:nvGraphicFramePr>
         <p:xfrm>
-          <a:off x="0" y="3886200"/>
+          <a:off x="914400" y="3902075"/>
           <a:ext cx="3886200" cy="1736725"/>
         </p:xfrm>
         <a:graphic>
@@ -22027,7 +22444,7 @@
                     </p:blipFill>
                     <p:spPr bwMode="auto">
                       <a:xfrm>
-                        <a:off x="0" y="3886200"/>
+                        <a:off x="914400" y="3902075"/>
                         <a:ext cx="3886200" cy="1736725"/>
                       </a:xfrm>
                       <a:prstGeom prst="rect">
@@ -22118,14 +22535,14 @@
           <a:effectLst/>
           <a:extLst>
             <a:ext uri="{909E8E84-426E-40dd-AFC4-6F175D3DCCD1}">
-              <a14:hiddenFill xmlns="" xmlns:a14="http://schemas.microsoft.com/office/drawing/2010/main">
+              <a14:hiddenFill xmlns:a14="http://schemas.microsoft.com/office/drawing/2010/main" xmlns="">
                 <a:solidFill>
                   <a:schemeClr val="accent1"/>
                 </a:solidFill>
               </a14:hiddenFill>
             </a:ext>
             <a:ext uri="{91240B29-F687-4f45-9708-019B960494DF}">
-              <a14:hiddenLine xmlns="" xmlns:a14="http://schemas.microsoft.com/office/drawing/2010/main" w="9525">
+              <a14:hiddenLine xmlns:a14="http://schemas.microsoft.com/office/drawing/2010/main" xmlns="" w="9525">
                 <a:solidFill>
                   <a:schemeClr val="tx1"/>
                 </a:solidFill>
@@ -22135,7 +22552,7 @@
               </a14:hiddenLine>
             </a:ext>
             <a:ext uri="{AF507438-7753-43e0-B8FC-AC1667EBCBE1}">
-              <a14:hiddenEffects xmlns="" xmlns:a14="http://schemas.microsoft.com/office/drawing/2010/main">
+              <a14:hiddenEffects xmlns:a14="http://schemas.microsoft.com/office/drawing/2010/main" xmlns="">
                 <a:effectLst>
                   <a:outerShdw blurRad="63500" dist="38099" dir="2700000" algn="ctr" rotWithShape="0">
                     <a:schemeClr val="bg2">
@@ -22190,14 +22607,14 @@
           <a:effectLst/>
           <a:extLst>
             <a:ext uri="{909E8E84-426E-40dd-AFC4-6F175D3DCCD1}">
-              <a14:hiddenFill xmlns="" xmlns:a14="http://schemas.microsoft.com/office/drawing/2010/main">
+              <a14:hiddenFill xmlns:a14="http://schemas.microsoft.com/office/drawing/2010/main" xmlns="">
                 <a:solidFill>
                   <a:schemeClr val="accent1"/>
                 </a:solidFill>
               </a14:hiddenFill>
             </a:ext>
             <a:ext uri="{91240B29-F687-4f45-9708-019B960494DF}">
-              <a14:hiddenLine xmlns="" xmlns:a14="http://schemas.microsoft.com/office/drawing/2010/main" w="9525">
+              <a14:hiddenLine xmlns:a14="http://schemas.microsoft.com/office/drawing/2010/main" xmlns="" w="9525">
                 <a:solidFill>
                   <a:schemeClr val="tx1"/>
                 </a:solidFill>
@@ -22207,7 +22624,7 @@
               </a14:hiddenLine>
             </a:ext>
             <a:ext uri="{AF507438-7753-43e0-B8FC-AC1667EBCBE1}">
-              <a14:hiddenEffects xmlns="" xmlns:a14="http://schemas.microsoft.com/office/drawing/2010/main">
+              <a14:hiddenEffects xmlns:a14="http://schemas.microsoft.com/office/drawing/2010/main" xmlns="">
                 <a:effectLst>
                   <a:outerShdw blurRad="63500" dist="38099" dir="2700000" algn="ctr" rotWithShape="0">
                     <a:schemeClr val="bg2">
@@ -22262,14 +22679,14 @@
           <a:effectLst/>
           <a:extLst>
             <a:ext uri="{909E8E84-426E-40dd-AFC4-6F175D3DCCD1}">
-              <a14:hiddenFill xmlns="" xmlns:a14="http://schemas.microsoft.com/office/drawing/2010/main">
+              <a14:hiddenFill xmlns:a14="http://schemas.microsoft.com/office/drawing/2010/main" xmlns="">
                 <a:solidFill>
                   <a:schemeClr val="accent1"/>
                 </a:solidFill>
               </a14:hiddenFill>
             </a:ext>
             <a:ext uri="{91240B29-F687-4f45-9708-019B960494DF}">
-              <a14:hiddenLine xmlns="" xmlns:a14="http://schemas.microsoft.com/office/drawing/2010/main" w="9525">
+              <a14:hiddenLine xmlns:a14="http://schemas.microsoft.com/office/drawing/2010/main" xmlns="" w="9525">
                 <a:solidFill>
                   <a:schemeClr val="tx1"/>
                 </a:solidFill>
@@ -22279,7 +22696,7 @@
               </a14:hiddenLine>
             </a:ext>
             <a:ext uri="{AF507438-7753-43e0-B8FC-AC1667EBCBE1}">
-              <a14:hiddenEffects xmlns="" xmlns:a14="http://schemas.microsoft.com/office/drawing/2010/main">
+              <a14:hiddenEffects xmlns:a14="http://schemas.microsoft.com/office/drawing/2010/main" xmlns="">
                 <a:effectLst>
                   <a:outerShdw blurRad="63500" dist="38099" dir="2700000" algn="ctr" rotWithShape="0">
                     <a:schemeClr val="bg2">
@@ -22488,7 +22905,7 @@
         </p:nvSpPr>
         <p:spPr>
           <a:xfrm>
-            <a:off x="0" y="1287463"/>
+            <a:off x="1020398" y="1356474"/>
             <a:ext cx="7848600" cy="4572000"/>
           </a:xfrm>
         </p:spPr>
@@ -22660,13 +23077,13 @@
             <p:ph sz="quarter" idx="4294967295"/>
             <p:extLst>
               <p:ext uri="{D42A27DB-BD31-4B8C-83A1-F6EECF244321}">
-                <p14:modId xmlns:p14="http://schemas.microsoft.com/office/powerpoint/2010/main" val="2459081507"/>
+                <p14:modId xmlns:p14="http://schemas.microsoft.com/office/powerpoint/2010/main" val="913878395"/>
               </p:ext>
             </p:extLst>
           </p:nvPr>
         </p:nvGraphicFramePr>
         <p:xfrm>
-          <a:off x="0" y="2505075"/>
+          <a:off x="2093913" y="2459328"/>
           <a:ext cx="2182813" cy="981075"/>
         </p:xfrm>
         <a:graphic>
@@ -22709,7 +23126,7 @@
                     </p:blipFill>
                     <p:spPr bwMode="auto">
                       <a:xfrm>
-                        <a:off x="0" y="2505075"/>
+                        <a:off x="2093913" y="2459328"/>
                         <a:ext cx="2182813" cy="981075"/>
                       </a:xfrm>
                       <a:prstGeom prst="rect">
@@ -22900,7 +23317,7 @@
           <a:effectLst/>
           <a:extLst>
             <a:ext uri="{91240B29-F687-4f45-9708-019B960494DF}">
-              <a14:hiddenLine xmlns="" xmlns:a14="http://schemas.microsoft.com/office/drawing/2010/main" w="9525">
+              <a14:hiddenLine xmlns:a14="http://schemas.microsoft.com/office/drawing/2010/main" xmlns="" w="9525">
                 <a:solidFill>
                   <a:schemeClr val="tx1"/>
                 </a:solidFill>
@@ -22910,7 +23327,7 @@
               </a14:hiddenLine>
             </a:ext>
             <a:ext uri="{AF507438-7753-43e0-B8FC-AC1667EBCBE1}">
-              <a14:hiddenEffects xmlns="" xmlns:a14="http://schemas.microsoft.com/office/drawing/2010/main">
+              <a14:hiddenEffects xmlns:a14="http://schemas.microsoft.com/office/drawing/2010/main" xmlns="">
                 <a:effectLst>
                   <a:outerShdw blurRad="63500" dist="38099" dir="2700000" algn="ctr" rotWithShape="0">
                     <a:schemeClr val="bg2">
@@ -22978,14 +23395,14 @@
           <a:effectLst/>
           <a:extLst>
             <a:ext uri="{909E8E84-426E-40dd-AFC4-6F175D3DCCD1}">
-              <a14:hiddenFill xmlns="" xmlns:a14="http://schemas.microsoft.com/office/drawing/2010/main">
+              <a14:hiddenFill xmlns:a14="http://schemas.microsoft.com/office/drawing/2010/main" xmlns="">
                 <a:solidFill>
                   <a:schemeClr val="accent1"/>
                 </a:solidFill>
               </a14:hiddenFill>
             </a:ext>
             <a:ext uri="{91240B29-F687-4f45-9708-019B960494DF}">
-              <a14:hiddenLine xmlns="" xmlns:a14="http://schemas.microsoft.com/office/drawing/2010/main" w="9525">
+              <a14:hiddenLine xmlns:a14="http://schemas.microsoft.com/office/drawing/2010/main" xmlns="" w="9525">
                 <a:solidFill>
                   <a:schemeClr val="tx1"/>
                 </a:solidFill>
@@ -22995,7 +23412,7 @@
               </a14:hiddenLine>
             </a:ext>
             <a:ext uri="{AF507438-7753-43e0-B8FC-AC1667EBCBE1}">
-              <a14:hiddenEffects xmlns="" xmlns:a14="http://schemas.microsoft.com/office/drawing/2010/main">
+              <a14:hiddenEffects xmlns:a14="http://schemas.microsoft.com/office/drawing/2010/main" xmlns="">
                 <a:effectLst>
                   <a:outerShdw blurRad="63500" dist="38099" dir="2700000" algn="ctr" rotWithShape="0">
                     <a:schemeClr val="bg2">
@@ -23573,14 +23990,14 @@
           <a:effectLst/>
           <a:extLst>
             <a:ext uri="{909E8E84-426E-40dd-AFC4-6F175D3DCCD1}">
-              <a14:hiddenFill xmlns="" xmlns:a14="http://schemas.microsoft.com/office/drawing/2010/main">
+              <a14:hiddenFill xmlns:a14="http://schemas.microsoft.com/office/drawing/2010/main" xmlns="">
                 <a:solidFill>
                   <a:schemeClr val="accent1"/>
                 </a:solidFill>
               </a14:hiddenFill>
             </a:ext>
             <a:ext uri="{91240B29-F687-4f45-9708-019B960494DF}">
-              <a14:hiddenLine xmlns="" xmlns:a14="http://schemas.microsoft.com/office/drawing/2010/main" w="9525">
+              <a14:hiddenLine xmlns:a14="http://schemas.microsoft.com/office/drawing/2010/main" xmlns="" w="9525">
                 <a:solidFill>
                   <a:schemeClr val="tx1"/>
                 </a:solidFill>
@@ -23590,7 +24007,7 @@
               </a14:hiddenLine>
             </a:ext>
             <a:ext uri="{AF507438-7753-43e0-B8FC-AC1667EBCBE1}">
-              <a14:hiddenEffects xmlns="" xmlns:a14="http://schemas.microsoft.com/office/drawing/2010/main">
+              <a14:hiddenEffects xmlns:a14="http://schemas.microsoft.com/office/drawing/2010/main" xmlns="">
                 <a:effectLst>
                   <a:outerShdw blurRad="63500" dist="38099" dir="2700000" algn="ctr" rotWithShape="0">
                     <a:schemeClr val="bg2">
@@ -23647,14 +24064,14 @@
           <a:effectLst/>
           <a:extLst>
             <a:ext uri="{909E8E84-426E-40dd-AFC4-6F175D3DCCD1}">
-              <a14:hiddenFill xmlns="" xmlns:a14="http://schemas.microsoft.com/office/drawing/2010/main">
+              <a14:hiddenFill xmlns:a14="http://schemas.microsoft.com/office/drawing/2010/main" xmlns="">
                 <a:solidFill>
                   <a:schemeClr val="accent1"/>
                 </a:solidFill>
               </a14:hiddenFill>
             </a:ext>
             <a:ext uri="{91240B29-F687-4f45-9708-019B960494DF}">
-              <a14:hiddenLine xmlns="" xmlns:a14="http://schemas.microsoft.com/office/drawing/2010/main" w="9525">
+              <a14:hiddenLine xmlns:a14="http://schemas.microsoft.com/office/drawing/2010/main" xmlns="" w="9525">
                 <a:solidFill>
                   <a:schemeClr val="tx1"/>
                 </a:solidFill>
@@ -23664,7 +24081,7 @@
               </a14:hiddenLine>
             </a:ext>
             <a:ext uri="{AF507438-7753-43e0-B8FC-AC1667EBCBE1}">
-              <a14:hiddenEffects xmlns="" xmlns:a14="http://schemas.microsoft.com/office/drawing/2010/main">
+              <a14:hiddenEffects xmlns:a14="http://schemas.microsoft.com/office/drawing/2010/main" xmlns="">
                 <a:effectLst>
                   <a:outerShdw blurRad="63500" dist="38099" dir="2700000" algn="ctr" rotWithShape="0">
                     <a:schemeClr val="bg2">
@@ -25292,6 +25709,16 @@
 </file>
 
 <file path=customXml/item1.xml><?xml version="1.0" encoding="utf-8"?>
+<?mso-contentType ?>
+<customXsn xmlns="http://schemas.microsoft.com/office/2006/metadata/customXsn">
+  <xsnLocation/>
+  <cached>True</cached>
+  <openByDefault>True</openByDefault>
+  <xsnScope/>
+</customXsn>
+</file>
+
+<file path=customXml/item2.xml><?xml version="1.0" encoding="utf-8"?>
 <ct:contentTypeSchema xmlns:ct="http://schemas.microsoft.com/office/2006/metadata/contentType" xmlns:ma="http://schemas.microsoft.com/office/2006/metadata/properties/metaAttributes" ct:_="" ma:_="" ma:contentTypeName="ARM Document" ma:contentTypeID="0x0101005C6975769EB1684CAB07571CAE07A11B0100BC81FA0C64ACC243A77959D9266C7751" ma:contentTypeVersion="27" ma:contentTypeDescription="" ma:contentTypeScope="" ma:versionID="c3d44a507a30e34bb56df6cb41b0e970">
   <xsd:schema xmlns:xsd="http://www.w3.org/2001/XMLSchema" xmlns:xs="http://www.w3.org/2001/XMLSchema" xmlns:p="http://schemas.microsoft.com/office/2006/metadata/properties" xmlns:ns1="http://schemas.microsoft.com/sharepoint/v3" xmlns:ns2="f2ad5090-61a8-4b8c-ab70-68f4ff4d1933" xmlns:ns3="http://schemas.microsoft.com/sharepoint/v3/fields" xmlns:ns4="c0950e01-db07-4e41-9c32-b7a8e9fccc9b" targetNamespace="http://schemas.microsoft.com/office/2006/metadata/properties" ma:root="true" ma:fieldsID="d6365f768a9cf65e3d0aaa644537f94f" ns1:_="" ns2:_="" ns3:_="" ns4:_="">
     <xsd:import namespace="http://schemas.microsoft.com/sharepoint/v3"/>
@@ -25575,63 +26002,7 @@
 </ct:contentTypeSchema>
 </file>
 
-<file path=customXml/item2.xml><?xml version="1.0" encoding="utf-8"?>
-<?mso-contentType ?>
-<customXsn xmlns="http://schemas.microsoft.com/office/2006/metadata/customXsn">
-  <xsnLocation/>
-  <cached>True</cached>
-  <openByDefault>True</openByDefault>
-  <xsnScope/>
-</customXsn>
-</file>
-
 <file path=customXml/item3.xml><?xml version="1.0" encoding="utf-8"?>
-<p:properties xmlns:p="http://schemas.microsoft.com/office/2006/metadata/properties" xmlns:xsi="http://www.w3.org/2001/XMLSchema-instance" xmlns:pc="http://schemas.microsoft.com/office/infopath/2007/PartnerControls">
-  <documentManagement>
-    <Current_x0020_Version xmlns="f2ad5090-61a8-4b8c-ab70-68f4ff4d1933">9.0</Current_x0020_Version>
-    <Document_x0020_Author xmlns="f2ad5090-61a8-4b8c-ab70-68f4ff4d1933">
-      <UserInfo>
-        <DisplayName/>
-        <AccountId xsi:nil="true"/>
-        <AccountType/>
-      </UserInfo>
-    </Document_x0020_Author>
-    <_dlc_DocId xmlns="f2ad5090-61a8-4b8c-ab70-68f4ff4d1933">ARM-ECM-0633231</_dlc_DocId>
-    <Document_x0020_Confidentiality xmlns="f2ad5090-61a8-4b8c-ab70-68f4ff4d1933">Confidential-Restricted</Document_x0020_Confidentiality>
-    <_dlc_DocIdUrl xmlns="f2ad5090-61a8-4b8c-ab70-68f4ff4d1933">
-      <Url>http://teamsites.arm.com/sites/cthub/_layouts/DocIdRedir.aspx?ID=ARM-ECM-0633231</Url>
-      <Description>ARM-ECM-0633231</Description>
-    </_dlc_DocIdUrl>
-    <Category xmlns="c0950e01-db07-4e41-9c32-b7a8e9fccc9b">Private Presentation Templates</Category>
-    <ARM_x0020_Legacy_x0020_ID xmlns="f2ad5090-61a8-4b8c-ab70-68f4ff4d1933" xsi:nil="true"/>
-    <TaxCatchAll xmlns="f2ad5090-61a8-4b8c-ab70-68f4ff4d1933">
-      <Value>7</Value>
-      <Value>1</Value>
-    </TaxCatchAll>
-    <j60c3ced31bb40378c6254d49035d966 xmlns="f2ad5090-61a8-4b8c-ab70-68f4ff4d1933">
-      <Terms xmlns="http://schemas.microsoft.com/office/infopath/2007/PartnerControls">
-        <TermInfo xmlns="http://schemas.microsoft.com/office/infopath/2007/PartnerControls">
-          <TermName xmlns="http://schemas.microsoft.com/office/infopath/2007/PartnerControls">2017</TermName>
-          <TermId xmlns="http://schemas.microsoft.com/office/infopath/2007/PartnerControls">58467e81-5d99-44a5-abb5-12a016b65e9e</TermId>
-        </TermInfo>
-      </Terms>
-    </j60c3ced31bb40378c6254d49035d966>
-    <RoutingRuleDescription xmlns="http://schemas.microsoft.com/sharepoint/v3" xsi:nil="true"/>
-    <_Status xmlns="http://schemas.microsoft.com/sharepoint/v3/fields">Not Started</_Status>
-  </documentManagement>
-</p:properties>
-</file>
-
-<file path=customXml/item4.xml><?xml version="1.0" encoding="utf-8"?>
-<?mso-contentType ?>
-<FormTemplates xmlns="http://schemas.microsoft.com/sharepoint/v3/contenttype/forms">
-  <Display>DocumentLibraryForm</Display>
-  <Edit>DocumentLibraryForm</Edit>
-  <New>DocumentLibraryForm</New>
-</FormTemplates>
-</file>
-
-<file path=customXml/item5.xml><?xml version="1.0" encoding="utf-8"?>
 <?mso-contentType ?>
 <spe:Receivers xmlns:spe="http://schemas.microsoft.com/sharepoint/events">
   <Receiver>
@@ -25677,7 +26048,61 @@
 </spe:Receivers>
 </file>
 
+<file path=customXml/item4.xml><?xml version="1.0" encoding="utf-8"?>
+<?mso-contentType ?>
+<FormTemplates xmlns="http://schemas.microsoft.com/sharepoint/v3/contenttype/forms">
+  <Display>DocumentLibraryForm</Display>
+  <Edit>DocumentLibraryForm</Edit>
+  <New>DocumentLibraryForm</New>
+</FormTemplates>
+</file>
+
+<file path=customXml/item5.xml><?xml version="1.0" encoding="utf-8"?>
+<p:properties xmlns:p="http://schemas.microsoft.com/office/2006/metadata/properties" xmlns:xsi="http://www.w3.org/2001/XMLSchema-instance" xmlns:pc="http://schemas.microsoft.com/office/infopath/2007/PartnerControls">
+  <documentManagement>
+    <Current_x0020_Version xmlns="f2ad5090-61a8-4b8c-ab70-68f4ff4d1933">9.0</Current_x0020_Version>
+    <Document_x0020_Author xmlns="f2ad5090-61a8-4b8c-ab70-68f4ff4d1933">
+      <UserInfo>
+        <DisplayName/>
+        <AccountId xsi:nil="true"/>
+        <AccountType/>
+      </UserInfo>
+    </Document_x0020_Author>
+    <_dlc_DocId xmlns="f2ad5090-61a8-4b8c-ab70-68f4ff4d1933">ARM-ECM-0633231</_dlc_DocId>
+    <Document_x0020_Confidentiality xmlns="f2ad5090-61a8-4b8c-ab70-68f4ff4d1933">Confidential-Restricted</Document_x0020_Confidentiality>
+    <_dlc_DocIdUrl xmlns="f2ad5090-61a8-4b8c-ab70-68f4ff4d1933">
+      <Url>http://teamsites.arm.com/sites/cthub/_layouts/DocIdRedir.aspx?ID=ARM-ECM-0633231</Url>
+      <Description>ARM-ECM-0633231</Description>
+    </_dlc_DocIdUrl>
+    <Category xmlns="c0950e01-db07-4e41-9c32-b7a8e9fccc9b">Private Presentation Templates</Category>
+    <ARM_x0020_Legacy_x0020_ID xmlns="f2ad5090-61a8-4b8c-ab70-68f4ff4d1933" xsi:nil="true"/>
+    <TaxCatchAll xmlns="f2ad5090-61a8-4b8c-ab70-68f4ff4d1933">
+      <Value>7</Value>
+      <Value>1</Value>
+    </TaxCatchAll>
+    <j60c3ced31bb40378c6254d49035d966 xmlns="f2ad5090-61a8-4b8c-ab70-68f4ff4d1933">
+      <Terms xmlns="http://schemas.microsoft.com/office/infopath/2007/PartnerControls">
+        <TermInfo xmlns="http://schemas.microsoft.com/office/infopath/2007/PartnerControls">
+          <TermName xmlns="http://schemas.microsoft.com/office/infopath/2007/PartnerControls">2017</TermName>
+          <TermId xmlns="http://schemas.microsoft.com/office/infopath/2007/PartnerControls">58467e81-5d99-44a5-abb5-12a016b65e9e</TermId>
+        </TermInfo>
+      </Terms>
+    </j60c3ced31bb40378c6254d49035d966>
+    <RoutingRuleDescription xmlns="http://schemas.microsoft.com/sharepoint/v3" xsi:nil="true"/>
+    <_Status xmlns="http://schemas.microsoft.com/sharepoint/v3/fields">Not Started</_Status>
+  </documentManagement>
+</p:properties>
+</file>
+
 <file path=customXml/itemProps1.xml><?xml version="1.0" encoding="utf-8"?>
+<ds:datastoreItem xmlns:ds="http://schemas.openxmlformats.org/officeDocument/2006/customXml" ds:itemID="{C959113B-7FA4-40AB-AF85-5C5588D4771C}">
+  <ds:schemaRefs>
+    <ds:schemaRef ds:uri="http://schemas.microsoft.com/office/2006/metadata/customXsn"/>
+  </ds:schemaRefs>
+</ds:datastoreItem>
+</file>
+
+<file path=customXml/itemProps2.xml><?xml version="1.0" encoding="utf-8"?>
 <ds:datastoreItem xmlns:ds="http://schemas.openxmlformats.org/officeDocument/2006/customXml" ds:itemID="{5675509F-A6F5-4147-861D-E4CC99F48FA5}">
   <ds:schemaRefs>
     <ds:schemaRef ds:uri="http://schemas.microsoft.com/office/2006/metadata/contentType"/>
@@ -25698,15 +26123,23 @@
 </ds:datastoreItem>
 </file>
 
-<file path=customXml/itemProps2.xml><?xml version="1.0" encoding="utf-8"?>
-<ds:datastoreItem xmlns:ds="http://schemas.openxmlformats.org/officeDocument/2006/customXml" ds:itemID="{C959113B-7FA4-40AB-AF85-5C5588D4771C}">
+<file path=customXml/itemProps3.xml><?xml version="1.0" encoding="utf-8"?>
+<ds:datastoreItem xmlns:ds="http://schemas.openxmlformats.org/officeDocument/2006/customXml" ds:itemID="{1E7F2E56-8924-419D-99E9-79DB71144EB2}">
   <ds:schemaRefs>
-    <ds:schemaRef ds:uri="http://schemas.microsoft.com/office/2006/metadata/customXsn"/>
+    <ds:schemaRef ds:uri="http://schemas.microsoft.com/sharepoint/events"/>
   </ds:schemaRefs>
 </ds:datastoreItem>
 </file>
 
-<file path=customXml/itemProps3.xml><?xml version="1.0" encoding="utf-8"?>
+<file path=customXml/itemProps4.xml><?xml version="1.0" encoding="utf-8"?>
+<ds:datastoreItem xmlns:ds="http://schemas.openxmlformats.org/officeDocument/2006/customXml" ds:itemID="{82EFBBFE-5AFC-4CAD-AD38-1CB870BDB255}">
+  <ds:schemaRefs>
+    <ds:schemaRef ds:uri="http://schemas.microsoft.com/sharepoint/v3/contenttype/forms"/>
+  </ds:schemaRefs>
+</ds:datastoreItem>
+</file>
+
+<file path=customXml/itemProps5.xml><?xml version="1.0" encoding="utf-8"?>
 <ds:datastoreItem xmlns:ds="http://schemas.openxmlformats.org/officeDocument/2006/customXml" ds:itemID="{B61D4E06-5D3F-4994-A4A7-4BA626FA722D}">
   <ds:schemaRefs>
     <ds:schemaRef ds:uri="http://www.w3.org/XML/1998/namespace"/>
@@ -25723,20 +26156,4 @@
     <ds:schemaRef ds:uri="http://schemas.microsoft.com/office/2006/metadata/properties"/>
   </ds:schemaRefs>
 </ds:datastoreItem>
-</file>
-
-<file path=customXml/itemProps4.xml><?xml version="1.0" encoding="utf-8"?>
-<ds:datastoreItem xmlns:ds="http://schemas.openxmlformats.org/officeDocument/2006/customXml" ds:itemID="{82EFBBFE-5AFC-4CAD-AD38-1CB870BDB255}">
-  <ds:schemaRefs>
-    <ds:schemaRef ds:uri="http://schemas.microsoft.com/sharepoint/v3/contenttype/forms"/>
-  </ds:schemaRefs>
-</ds:datastoreItem>
-</file>
-
-<file path=customXml/itemProps5.xml><?xml version="1.0" encoding="utf-8"?>
-<ds:datastoreItem xmlns:ds="http://schemas.openxmlformats.org/officeDocument/2006/customXml" ds:itemID="{1E7F2E56-8924-419D-99E9-79DB71144EB2}">
-  <ds:schemaRefs>
-    <ds:schemaRef ds:uri="http://schemas.microsoft.com/sharepoint/events"/>
-  </ds:schemaRefs>
-</ds:datastoreItem>
 </file>